--- a/docs/academic/TeslimEdilecekler/Sunumlar/05_Final_Savunma_Sunumu.pptx
+++ b/docs/academic/TeslimEdilecekler/Sunumlar/05_Final_Savunma_Sunumu.pptx
@@ -4248,7 +4248,7 @@
         <p:spPr>
           <a:xfrm>
             <a:off x="365760" y="6473952"/>
-            <a:ext cx="7772400" cy="292608"/>
+            <a:ext cx="4206240" cy="292608"/>
           </a:xfrm>
           <a:prstGeom prst="rect">
             <a:avLst/>
@@ -4269,7 +4269,7 @@
                 </a:solidFill>
                 <a:latin typeface="Calibri"/>
               </a:rPr>
-              <a:t>AURIS  ·  Yapay Zekâ Üretimli Müzik Tespiti</a:t>
+              <a:t>AURIS · YZ Üretimli Müzik Tespiti</a:t>
             </a:r>
           </a:p>
         </p:txBody>
@@ -4282,8 +4282,8 @@
         </p:nvSpPr>
         <p:spPr>
           <a:xfrm>
-            <a:off x="5029200" y="6473952"/>
-            <a:ext cx="6793992" cy="292608"/>
+            <a:off x="4663440" y="6473952"/>
+            <a:ext cx="7159752" cy="292608"/>
           </a:xfrm>
           <a:prstGeom prst="rect">
             <a:avLst/>
@@ -8356,7 +8356,7 @@
         <p:spPr>
           <a:xfrm>
             <a:off x="365760" y="6473952"/>
-            <a:ext cx="7772400" cy="292608"/>
+            <a:ext cx="4206240" cy="292608"/>
           </a:xfrm>
           <a:prstGeom prst="rect">
             <a:avLst/>
@@ -8377,7 +8377,7 @@
                 </a:solidFill>
                 <a:latin typeface="Calibri"/>
               </a:rPr>
-              <a:t>AURIS  ·  Yapay Zekâ Üretimli Müzik Tespiti</a:t>
+              <a:t>AURIS · YZ Üretimli Müzik Tespiti</a:t>
             </a:r>
           </a:p>
         </p:txBody>
@@ -8390,8 +8390,8 @@
         </p:nvSpPr>
         <p:spPr>
           <a:xfrm>
-            <a:off x="5029200" y="6473952"/>
-            <a:ext cx="6793992" cy="292608"/>
+            <a:off x="4663440" y="6473952"/>
+            <a:ext cx="7159752" cy="292608"/>
           </a:xfrm>
           <a:prstGeom prst="rect">
             <a:avLst/>
@@ -9431,7 +9431,7 @@
         <p:spPr>
           <a:xfrm>
             <a:off x="365760" y="6473952"/>
-            <a:ext cx="7772400" cy="292608"/>
+            <a:ext cx="4206240" cy="292608"/>
           </a:xfrm>
           <a:prstGeom prst="rect">
             <a:avLst/>
@@ -9452,7 +9452,7 @@
                 </a:solidFill>
                 <a:latin typeface="Calibri"/>
               </a:rPr>
-              <a:t>AURIS  ·  Yapay Zekâ Üretimli Müzik Tespiti</a:t>
+              <a:t>AURIS · YZ Üretimli Müzik Tespiti</a:t>
             </a:r>
           </a:p>
         </p:txBody>
@@ -9465,8 +9465,8 @@
         </p:nvSpPr>
         <p:spPr>
           <a:xfrm>
-            <a:off x="5029200" y="6473952"/>
-            <a:ext cx="6793992" cy="292608"/>
+            <a:off x="4663440" y="6473952"/>
+            <a:ext cx="7159752" cy="292608"/>
           </a:xfrm>
           <a:prstGeom prst="rect">
             <a:avLst/>
@@ -12763,7 +12763,7 @@
         <p:spPr>
           <a:xfrm>
             <a:off x="365760" y="6473952"/>
-            <a:ext cx="7772400" cy="292608"/>
+            <a:ext cx="4206240" cy="292608"/>
           </a:xfrm>
           <a:prstGeom prst="rect">
             <a:avLst/>
@@ -12784,7 +12784,7 @@
                 </a:solidFill>
                 <a:latin typeface="Calibri"/>
               </a:rPr>
-              <a:t>AURIS  ·  Yapay Zekâ Üretimli Müzik Tespiti</a:t>
+              <a:t>AURIS · YZ Üretimli Müzik Tespiti</a:t>
             </a:r>
           </a:p>
         </p:txBody>
@@ -12797,8 +12797,8 @@
         </p:nvSpPr>
         <p:spPr>
           <a:xfrm>
-            <a:off x="5029200" y="6473952"/>
-            <a:ext cx="6793992" cy="292608"/>
+            <a:off x="4663440" y="6473952"/>
+            <a:ext cx="7159752" cy="292608"/>
           </a:xfrm>
           <a:prstGeom prst="rect">
             <a:avLst/>
@@ -14103,7 +14103,7 @@
         <p:spPr>
           <a:xfrm>
             <a:off x="365760" y="6473952"/>
-            <a:ext cx="7772400" cy="292608"/>
+            <a:ext cx="4206240" cy="292608"/>
           </a:xfrm>
           <a:prstGeom prst="rect">
             <a:avLst/>
@@ -14124,7 +14124,7 @@
                 </a:solidFill>
                 <a:latin typeface="Calibri"/>
               </a:rPr>
-              <a:t>AURIS  ·  Yapay Zekâ Üretimli Müzik Tespiti</a:t>
+              <a:t>AURIS · YZ Üretimli Müzik Tespiti</a:t>
             </a:r>
           </a:p>
         </p:txBody>
@@ -14137,8 +14137,8 @@
         </p:nvSpPr>
         <p:spPr>
           <a:xfrm>
-            <a:off x="5029200" y="6473952"/>
-            <a:ext cx="6793992" cy="292608"/>
+            <a:off x="4663440" y="6473952"/>
+            <a:ext cx="7159752" cy="292608"/>
           </a:xfrm>
           <a:prstGeom prst="rect">
             <a:avLst/>
@@ -15420,7 +15420,7 @@
         <p:spPr>
           <a:xfrm>
             <a:off x="365760" y="6473952"/>
-            <a:ext cx="7772400" cy="292608"/>
+            <a:ext cx="4206240" cy="292608"/>
           </a:xfrm>
           <a:prstGeom prst="rect">
             <a:avLst/>
@@ -15441,7 +15441,7 @@
                 </a:solidFill>
                 <a:latin typeface="Calibri"/>
               </a:rPr>
-              <a:t>AURIS  ·  Yapay Zekâ Üretimli Müzik Tespiti</a:t>
+              <a:t>AURIS · YZ Üretimli Müzik Tespiti</a:t>
             </a:r>
           </a:p>
         </p:txBody>
@@ -15454,8 +15454,8 @@
         </p:nvSpPr>
         <p:spPr>
           <a:xfrm>
-            <a:off x="5029200" y="6473952"/>
-            <a:ext cx="6793992" cy="292608"/>
+            <a:off x="4663440" y="6473952"/>
+            <a:ext cx="7159752" cy="292608"/>
           </a:xfrm>
           <a:prstGeom prst="rect">
             <a:avLst/>
@@ -16377,7 +16377,7 @@
         <p:spPr>
           <a:xfrm>
             <a:off x="365760" y="6473952"/>
-            <a:ext cx="7772400" cy="292608"/>
+            <a:ext cx="4206240" cy="292608"/>
           </a:xfrm>
           <a:prstGeom prst="rect">
             <a:avLst/>
@@ -16398,7 +16398,7 @@
                 </a:solidFill>
                 <a:latin typeface="Calibri"/>
               </a:rPr>
-              <a:t>AURIS  ·  Yapay Zekâ Üretimli Müzik Tespiti</a:t>
+              <a:t>AURIS · YZ Üretimli Müzik Tespiti</a:t>
             </a:r>
           </a:p>
         </p:txBody>
@@ -16411,8 +16411,8 @@
         </p:nvSpPr>
         <p:spPr>
           <a:xfrm>
-            <a:off x="5029200" y="6473952"/>
-            <a:ext cx="6793992" cy="292608"/>
+            <a:off x="4663440" y="6473952"/>
+            <a:ext cx="7159752" cy="292608"/>
           </a:xfrm>
           <a:prstGeom prst="rect">
             <a:avLst/>
@@ -16595,118 +16595,6 @@
           <a:solidFill>
             <a:srgbClr val="081B33"/>
           </a:solidFill>
-          <a:ln>
-            <a:noFill/>
-          </a:ln>
-          <a:effectLst/>
-        </p:spPr>
-        <p:style>
-          <a:lnRef idx="1">
-            <a:schemeClr val="accent1"/>
-          </a:lnRef>
-          <a:fillRef idx="3">
-            <a:schemeClr val="accent1"/>
-          </a:fillRef>
-          <a:effectRef idx="2">
-            <a:schemeClr val="accent1"/>
-          </a:effectRef>
-          <a:fontRef idx="minor">
-            <a:schemeClr val="lt1"/>
-          </a:fontRef>
-        </p:style>
-        <p:txBody>
-          <a:bodyPr rtlCol="0" anchor="ctr"/>
-          <a:lstStyle/>
-          <a:p>
-            <a:pPr algn="ctr"/>
-          </a:p>
-        </p:txBody>
-      </p:sp>
-      <p:sp>
-        <p:nvSpPr>
-          <p:cNvPr id="6" name="TextBox 5"/>
-          <p:cNvSpPr txBox="1"/>
-          <p:nvPr/>
-        </p:nvSpPr>
-        <p:spPr>
-          <a:xfrm>
-            <a:off x="1051560" y="3333902"/>
-            <a:ext cx="2240280" cy="640080"/>
-          </a:xfrm>
-          <a:prstGeom prst="rect">
-            <a:avLst/>
-          </a:prstGeom>
-          <a:noFill/>
-        </p:spPr>
-        <p:txBody>
-          <a:bodyPr wrap="square" anchor="ctr" lIns="25400" rIns="25400" tIns="12700" bIns="12700">
-            <a:spAutoFit/>
-          </a:bodyPr>
-          <a:lstStyle/>
-          <a:p>
-            <a:pPr algn="ctr"/>
-            <a:r>
-              <a:rPr sz="2600" b="1" i="0">
-                <a:solidFill>
-                  <a:srgbClr val="D99A07"/>
-                </a:solidFill>
-                <a:latin typeface="Calibri"/>
-              </a:rPr>
-              <a:t>0,9548</a:t>
-            </a:r>
-          </a:p>
-        </p:txBody>
-      </p:sp>
-      <p:sp>
-        <p:nvSpPr>
-          <p:cNvPr id="7" name="TextBox 6"/>
-          <p:cNvSpPr txBox="1"/>
-          <p:nvPr/>
-        </p:nvSpPr>
-        <p:spPr>
-          <a:xfrm>
-            <a:off x="1051560" y="3961180"/>
-            <a:ext cx="2240280" cy="435254"/>
-          </a:xfrm>
-          <a:prstGeom prst="rect">
-            <a:avLst/>
-          </a:prstGeom>
-          <a:noFill/>
-        </p:spPr>
-        <p:txBody>
-          <a:bodyPr wrap="square" anchor="ctr" lIns="25400" rIns="25400" tIns="12700" bIns="12700">
-            <a:spAutoFit/>
-          </a:bodyPr>
-          <a:lstStyle/>
-          <a:p>
-            <a:pPr algn="ctr"/>
-            <a:r>
-              <a:rPr sz="1100" b="0" i="0">
-                <a:solidFill>
-                  <a:srgbClr val="FFFFFF"/>
-                </a:solidFill>
-                <a:latin typeface="Calibri"/>
-              </a:rPr>
-              <a:t>ROC-AUC</a:t>
-            </a:r>
-          </a:p>
-        </p:txBody>
-      </p:sp>
-      <p:sp>
-        <p:nvSpPr>
-          <p:cNvPr id="8" name="Rectangle 7"/>
-          <p:cNvSpPr/>
-          <p:nvPr/>
-        </p:nvSpPr>
-        <p:spPr>
-          <a:xfrm>
-            <a:off x="1051560" y="3154680"/>
-            <a:ext cx="2240280" cy="1280160"/>
-          </a:xfrm>
-          <a:prstGeom prst="rect">
-            <a:avLst/>
-          </a:prstGeom>
-          <a:noFill/>
           <a:ln w="12700">
             <a:solidFill>
               <a:srgbClr val="0A808C"/>
@@ -16738,22 +16626,22 @@
       </p:sp>
       <p:sp>
         <p:nvSpPr>
-          <p:cNvPr id="9" name="TextBox 8"/>
-          <p:cNvSpPr txBox="1"/>
-          <p:nvPr/>
-        </p:nvSpPr>
-        <p:spPr>
-          <a:xfrm>
-            <a:off x="1051560" y="3218688"/>
-            <a:ext cx="2240280" cy="640080"/>
-          </a:xfrm>
-          <a:prstGeom prst="rect">
-            <a:avLst/>
-          </a:prstGeom>
-          <a:noFill/>
-        </p:spPr>
-        <p:txBody>
-          <a:bodyPr wrap="square" anchor="t" lIns="25400" rIns="25400" tIns="12700" bIns="12700">
+          <p:cNvPr id="6" name="TextBox 5"/>
+          <p:cNvSpPr txBox="1"/>
+          <p:nvPr/>
+        </p:nvSpPr>
+        <p:spPr>
+          <a:xfrm>
+            <a:off x="1051560" y="3246120"/>
+            <a:ext cx="2240280" cy="594360"/>
+          </a:xfrm>
+          <a:prstGeom prst="rect">
+            <a:avLst/>
+          </a:prstGeom>
+          <a:noFill/>
+        </p:spPr>
+        <p:txBody>
+          <a:bodyPr wrap="square" anchor="ctr" lIns="25400" rIns="25400" tIns="12700" bIns="12700">
             <a:spAutoFit/>
           </a:bodyPr>
           <a:lstStyle/>
@@ -16773,13 +16661,13 @@
       </p:sp>
       <p:sp>
         <p:nvSpPr>
-          <p:cNvPr id="10" name="TextBox 9"/>
-          <p:cNvSpPr txBox="1"/>
-          <p:nvPr/>
-        </p:nvSpPr>
-        <p:spPr>
-          <a:xfrm>
-            <a:off x="1051560" y="3840480"/>
+          <p:cNvPr id="7" name="TextBox 6"/>
+          <p:cNvSpPr txBox="1"/>
+          <p:nvPr/>
+        </p:nvSpPr>
+        <p:spPr>
+          <a:xfrm>
+            <a:off x="1051560" y="3822191"/>
             <a:ext cx="2240280" cy="457200"/>
           </a:xfrm>
           <a:prstGeom prst="rect">
@@ -16788,7 +16676,7 @@
           <a:noFill/>
         </p:spPr>
         <p:txBody>
-          <a:bodyPr wrap="square" anchor="t" lIns="25400" rIns="25400" tIns="12700" bIns="12700">
+          <a:bodyPr wrap="square" anchor="ctr" lIns="25400" rIns="25400" tIns="12700" bIns="12700">
             <a:spAutoFit/>
           </a:bodyPr>
           <a:lstStyle/>
@@ -16808,7 +16696,7 @@
       </p:sp>
       <p:sp>
         <p:nvSpPr>
-          <p:cNvPr id="11" name="Rectangle 10"/>
+          <p:cNvPr id="8" name="Rectangle 7"/>
           <p:cNvSpPr/>
           <p:nvPr/>
         </p:nvSpPr>
@@ -16823,118 +16711,6 @@
           <a:solidFill>
             <a:srgbClr val="081B33"/>
           </a:solidFill>
-          <a:ln>
-            <a:noFill/>
-          </a:ln>
-          <a:effectLst/>
-        </p:spPr>
-        <p:style>
-          <a:lnRef idx="1">
-            <a:schemeClr val="accent1"/>
-          </a:lnRef>
-          <a:fillRef idx="3">
-            <a:schemeClr val="accent1"/>
-          </a:fillRef>
-          <a:effectRef idx="2">
-            <a:schemeClr val="accent1"/>
-          </a:effectRef>
-          <a:fontRef idx="minor">
-            <a:schemeClr val="lt1"/>
-          </a:fontRef>
-        </p:style>
-        <p:txBody>
-          <a:bodyPr rtlCol="0" anchor="ctr"/>
-          <a:lstStyle/>
-          <a:p>
-            <a:pPr algn="ctr"/>
-          </a:p>
-        </p:txBody>
-      </p:sp>
-      <p:sp>
-        <p:nvSpPr>
-          <p:cNvPr id="12" name="TextBox 11"/>
-          <p:cNvSpPr txBox="1"/>
-          <p:nvPr/>
-        </p:nvSpPr>
-        <p:spPr>
-          <a:xfrm>
-            <a:off x="3593591" y="3333902"/>
-            <a:ext cx="2240280" cy="640080"/>
-          </a:xfrm>
-          <a:prstGeom prst="rect">
-            <a:avLst/>
-          </a:prstGeom>
-          <a:noFill/>
-        </p:spPr>
-        <p:txBody>
-          <a:bodyPr wrap="square" anchor="ctr" lIns="25400" rIns="25400" tIns="12700" bIns="12700">
-            <a:spAutoFit/>
-          </a:bodyPr>
-          <a:lstStyle/>
-          <a:p>
-            <a:pPr algn="ctr"/>
-            <a:r>
-              <a:rPr sz="2600" b="1" i="0">
-                <a:solidFill>
-                  <a:srgbClr val="D99A07"/>
-                </a:solidFill>
-                <a:latin typeface="Calibri"/>
-              </a:rPr>
-              <a:t>47</a:t>
-            </a:r>
-          </a:p>
-        </p:txBody>
-      </p:sp>
-      <p:sp>
-        <p:nvSpPr>
-          <p:cNvPr id="13" name="TextBox 12"/>
-          <p:cNvSpPr txBox="1"/>
-          <p:nvPr/>
-        </p:nvSpPr>
-        <p:spPr>
-          <a:xfrm>
-            <a:off x="3593591" y="3961180"/>
-            <a:ext cx="2240280" cy="435254"/>
-          </a:xfrm>
-          <a:prstGeom prst="rect">
-            <a:avLst/>
-          </a:prstGeom>
-          <a:noFill/>
-        </p:spPr>
-        <p:txBody>
-          <a:bodyPr wrap="square" anchor="ctr" lIns="25400" rIns="25400" tIns="12700" bIns="12700">
-            <a:spAutoFit/>
-          </a:bodyPr>
-          <a:lstStyle/>
-          <a:p>
-            <a:pPr algn="ctr"/>
-            <a:r>
-              <a:rPr sz="1100" b="0" i="0">
-                <a:solidFill>
-                  <a:srgbClr val="FFFFFF"/>
-                </a:solidFill>
-                <a:latin typeface="Calibri"/>
-              </a:rPr>
-              <a:t>Öznitelik</a:t>
-            </a:r>
-          </a:p>
-        </p:txBody>
-      </p:sp>
-      <p:sp>
-        <p:nvSpPr>
-          <p:cNvPr id="14" name="Rectangle 13"/>
-          <p:cNvSpPr/>
-          <p:nvPr/>
-        </p:nvSpPr>
-        <p:spPr>
-          <a:xfrm>
-            <a:off x="3593591" y="3154680"/>
-            <a:ext cx="2240280" cy="1280160"/>
-          </a:xfrm>
-          <a:prstGeom prst="rect">
-            <a:avLst/>
-          </a:prstGeom>
-          <a:noFill/>
           <a:ln w="12700">
             <a:solidFill>
               <a:srgbClr val="0A808C"/>
@@ -16966,22 +16742,22 @@
       </p:sp>
       <p:sp>
         <p:nvSpPr>
-          <p:cNvPr id="15" name="TextBox 14"/>
-          <p:cNvSpPr txBox="1"/>
-          <p:nvPr/>
-        </p:nvSpPr>
-        <p:spPr>
-          <a:xfrm>
-            <a:off x="3593591" y="3218688"/>
-            <a:ext cx="2240280" cy="640080"/>
-          </a:xfrm>
-          <a:prstGeom prst="rect">
-            <a:avLst/>
-          </a:prstGeom>
-          <a:noFill/>
-        </p:spPr>
-        <p:txBody>
-          <a:bodyPr wrap="square" anchor="t" lIns="25400" rIns="25400" tIns="12700" bIns="12700">
+          <p:cNvPr id="9" name="TextBox 8"/>
+          <p:cNvSpPr txBox="1"/>
+          <p:nvPr/>
+        </p:nvSpPr>
+        <p:spPr>
+          <a:xfrm>
+            <a:off x="3593591" y="3246120"/>
+            <a:ext cx="2240280" cy="594360"/>
+          </a:xfrm>
+          <a:prstGeom prst="rect">
+            <a:avLst/>
+          </a:prstGeom>
+          <a:noFill/>
+        </p:spPr>
+        <p:txBody>
+          <a:bodyPr wrap="square" anchor="ctr" lIns="25400" rIns="25400" tIns="12700" bIns="12700">
             <a:spAutoFit/>
           </a:bodyPr>
           <a:lstStyle/>
@@ -17001,13 +16777,13 @@
       </p:sp>
       <p:sp>
         <p:nvSpPr>
-          <p:cNvPr id="16" name="TextBox 15"/>
-          <p:cNvSpPr txBox="1"/>
-          <p:nvPr/>
-        </p:nvSpPr>
-        <p:spPr>
-          <a:xfrm>
-            <a:off x="3593591" y="3840480"/>
+          <p:cNvPr id="10" name="TextBox 9"/>
+          <p:cNvSpPr txBox="1"/>
+          <p:nvPr/>
+        </p:nvSpPr>
+        <p:spPr>
+          <a:xfrm>
+            <a:off x="3593591" y="3822191"/>
             <a:ext cx="2240280" cy="457200"/>
           </a:xfrm>
           <a:prstGeom prst="rect">
@@ -17016,7 +16792,7 @@
           <a:noFill/>
         </p:spPr>
         <p:txBody>
-          <a:bodyPr wrap="square" anchor="t" lIns="25400" rIns="25400" tIns="12700" bIns="12700">
+          <a:bodyPr wrap="square" anchor="ctr" lIns="25400" rIns="25400" tIns="12700" bIns="12700">
             <a:spAutoFit/>
           </a:bodyPr>
           <a:lstStyle/>
@@ -17036,7 +16812,7 @@
       </p:sp>
       <p:sp>
         <p:nvSpPr>
-          <p:cNvPr id="17" name="Rectangle 16"/>
+          <p:cNvPr id="11" name="Rectangle 10"/>
           <p:cNvSpPr/>
           <p:nvPr/>
         </p:nvSpPr>
@@ -17051,118 +16827,6 @@
           <a:solidFill>
             <a:srgbClr val="081B33"/>
           </a:solidFill>
-          <a:ln>
-            <a:noFill/>
-          </a:ln>
-          <a:effectLst/>
-        </p:spPr>
-        <p:style>
-          <a:lnRef idx="1">
-            <a:schemeClr val="accent1"/>
-          </a:lnRef>
-          <a:fillRef idx="3">
-            <a:schemeClr val="accent1"/>
-          </a:fillRef>
-          <a:effectRef idx="2">
-            <a:schemeClr val="accent1"/>
-          </a:effectRef>
-          <a:fontRef idx="minor">
-            <a:schemeClr val="lt1"/>
-          </a:fontRef>
-        </p:style>
-        <p:txBody>
-          <a:bodyPr rtlCol="0" anchor="ctr"/>
-          <a:lstStyle/>
-          <a:p>
-            <a:pPr algn="ctr"/>
-          </a:p>
-        </p:txBody>
-      </p:sp>
-      <p:sp>
-        <p:nvSpPr>
-          <p:cNvPr id="18" name="TextBox 17"/>
-          <p:cNvSpPr txBox="1"/>
-          <p:nvPr/>
-        </p:nvSpPr>
-        <p:spPr>
-          <a:xfrm>
-            <a:off x="6135623" y="3333902"/>
-            <a:ext cx="2240280" cy="640080"/>
-          </a:xfrm>
-          <a:prstGeom prst="rect">
-            <a:avLst/>
-          </a:prstGeom>
-          <a:noFill/>
-        </p:spPr>
-        <p:txBody>
-          <a:bodyPr wrap="square" anchor="ctr" lIns="25400" rIns="25400" tIns="12700" bIns="12700">
-            <a:spAutoFit/>
-          </a:bodyPr>
-          <a:lstStyle/>
-          <a:p>
-            <a:pPr algn="ctr"/>
-            <a:r>
-              <a:rPr sz="2600" b="1" i="0">
-                <a:solidFill>
-                  <a:srgbClr val="D99A07"/>
-                </a:solidFill>
-                <a:latin typeface="Calibri"/>
-              </a:rPr>
-              <a:t>11</a:t>
-            </a:r>
-          </a:p>
-        </p:txBody>
-      </p:sp>
-      <p:sp>
-        <p:nvSpPr>
-          <p:cNvPr id="19" name="TextBox 18"/>
-          <p:cNvSpPr txBox="1"/>
-          <p:nvPr/>
-        </p:nvSpPr>
-        <p:spPr>
-          <a:xfrm>
-            <a:off x="6135623" y="3961180"/>
-            <a:ext cx="2240280" cy="435254"/>
-          </a:xfrm>
-          <a:prstGeom prst="rect">
-            <a:avLst/>
-          </a:prstGeom>
-          <a:noFill/>
-        </p:spPr>
-        <p:txBody>
-          <a:bodyPr wrap="square" anchor="ctr" lIns="25400" rIns="25400" tIns="12700" bIns="12700">
-            <a:spAutoFit/>
-          </a:bodyPr>
-          <a:lstStyle/>
-          <a:p>
-            <a:pPr algn="ctr"/>
-            <a:r>
-              <a:rPr sz="1100" b="0" i="0">
-                <a:solidFill>
-                  <a:srgbClr val="FFFFFF"/>
-                </a:solidFill>
-                <a:latin typeface="Calibri"/>
-              </a:rPr>
-              <a:t>Model</a:t>
-            </a:r>
-          </a:p>
-        </p:txBody>
-      </p:sp>
-      <p:sp>
-        <p:nvSpPr>
-          <p:cNvPr id="20" name="Rectangle 19"/>
-          <p:cNvSpPr/>
-          <p:nvPr/>
-        </p:nvSpPr>
-        <p:spPr>
-          <a:xfrm>
-            <a:off x="6135623" y="3154680"/>
-            <a:ext cx="2240280" cy="1280160"/>
-          </a:xfrm>
-          <a:prstGeom prst="rect">
-            <a:avLst/>
-          </a:prstGeom>
-          <a:noFill/>
           <a:ln w="12700">
             <a:solidFill>
               <a:srgbClr val="0A808C"/>
@@ -17194,22 +16858,22 @@
       </p:sp>
       <p:sp>
         <p:nvSpPr>
-          <p:cNvPr id="21" name="TextBox 20"/>
-          <p:cNvSpPr txBox="1"/>
-          <p:nvPr/>
-        </p:nvSpPr>
-        <p:spPr>
-          <a:xfrm>
-            <a:off x="6135623" y="3218688"/>
-            <a:ext cx="2240280" cy="640080"/>
-          </a:xfrm>
-          <a:prstGeom prst="rect">
-            <a:avLst/>
-          </a:prstGeom>
-          <a:noFill/>
-        </p:spPr>
-        <p:txBody>
-          <a:bodyPr wrap="square" anchor="t" lIns="25400" rIns="25400" tIns="12700" bIns="12700">
+          <p:cNvPr id="12" name="TextBox 11"/>
+          <p:cNvSpPr txBox="1"/>
+          <p:nvPr/>
+        </p:nvSpPr>
+        <p:spPr>
+          <a:xfrm>
+            <a:off x="6135623" y="3246120"/>
+            <a:ext cx="2240280" cy="594360"/>
+          </a:xfrm>
+          <a:prstGeom prst="rect">
+            <a:avLst/>
+          </a:prstGeom>
+          <a:noFill/>
+        </p:spPr>
+        <p:txBody>
+          <a:bodyPr wrap="square" anchor="ctr" lIns="25400" rIns="25400" tIns="12700" bIns="12700">
             <a:spAutoFit/>
           </a:bodyPr>
           <a:lstStyle/>
@@ -17229,13 +16893,13 @@
       </p:sp>
       <p:sp>
         <p:nvSpPr>
-          <p:cNvPr id="22" name="TextBox 21"/>
-          <p:cNvSpPr txBox="1"/>
-          <p:nvPr/>
-        </p:nvSpPr>
-        <p:spPr>
-          <a:xfrm>
-            <a:off x="6135623" y="3840480"/>
+          <p:cNvPr id="13" name="TextBox 12"/>
+          <p:cNvSpPr txBox="1"/>
+          <p:nvPr/>
+        </p:nvSpPr>
+        <p:spPr>
+          <a:xfrm>
+            <a:off x="6135623" y="3822191"/>
             <a:ext cx="2240280" cy="457200"/>
           </a:xfrm>
           <a:prstGeom prst="rect">
@@ -17244,7 +16908,7 @@
           <a:noFill/>
         </p:spPr>
         <p:txBody>
-          <a:bodyPr wrap="square" anchor="t" lIns="25400" rIns="25400" tIns="12700" bIns="12700">
+          <a:bodyPr wrap="square" anchor="ctr" lIns="25400" rIns="25400" tIns="12700" bIns="12700">
             <a:spAutoFit/>
           </a:bodyPr>
           <a:lstStyle/>
@@ -17264,7 +16928,7 @@
       </p:sp>
       <p:sp>
         <p:nvSpPr>
-          <p:cNvPr id="23" name="Rectangle 22"/>
+          <p:cNvPr id="14" name="Rectangle 13"/>
           <p:cNvSpPr/>
           <p:nvPr/>
         </p:nvSpPr>
@@ -17279,118 +16943,6 @@
           <a:solidFill>
             <a:srgbClr val="081B33"/>
           </a:solidFill>
-          <a:ln>
-            <a:noFill/>
-          </a:ln>
-          <a:effectLst/>
-        </p:spPr>
-        <p:style>
-          <a:lnRef idx="1">
-            <a:schemeClr val="accent1"/>
-          </a:lnRef>
-          <a:fillRef idx="3">
-            <a:schemeClr val="accent1"/>
-          </a:fillRef>
-          <a:effectRef idx="2">
-            <a:schemeClr val="accent1"/>
-          </a:effectRef>
-          <a:fontRef idx="minor">
-            <a:schemeClr val="lt1"/>
-          </a:fontRef>
-        </p:style>
-        <p:txBody>
-          <a:bodyPr rtlCol="0" anchor="ctr"/>
-          <a:lstStyle/>
-          <a:p>
-            <a:pPr algn="ctr"/>
-          </a:p>
-        </p:txBody>
-      </p:sp>
-      <p:sp>
-        <p:nvSpPr>
-          <p:cNvPr id="24" name="TextBox 23"/>
-          <p:cNvSpPr txBox="1"/>
-          <p:nvPr/>
-        </p:nvSpPr>
-        <p:spPr>
-          <a:xfrm>
-            <a:off x="8677656" y="3333902"/>
-            <a:ext cx="2240280" cy="640080"/>
-          </a:xfrm>
-          <a:prstGeom prst="rect">
-            <a:avLst/>
-          </a:prstGeom>
-          <a:noFill/>
-        </p:spPr>
-        <p:txBody>
-          <a:bodyPr wrap="square" anchor="ctr" lIns="25400" rIns="25400" tIns="12700" bIns="12700">
-            <a:spAutoFit/>
-          </a:bodyPr>
-          <a:lstStyle/>
-          <a:p>
-            <a:pPr algn="ctr"/>
-            <a:r>
-              <a:rPr sz="2600" b="1" i="0">
-                <a:solidFill>
-                  <a:srgbClr val="D99A07"/>
-                </a:solidFill>
-                <a:latin typeface="Calibri"/>
-              </a:rPr>
-              <a:t>5.195</a:t>
-            </a:r>
-          </a:p>
-        </p:txBody>
-      </p:sp>
-      <p:sp>
-        <p:nvSpPr>
-          <p:cNvPr id="25" name="TextBox 24"/>
-          <p:cNvSpPr txBox="1"/>
-          <p:nvPr/>
-        </p:nvSpPr>
-        <p:spPr>
-          <a:xfrm>
-            <a:off x="8677656" y="3961180"/>
-            <a:ext cx="2240280" cy="435254"/>
-          </a:xfrm>
-          <a:prstGeom prst="rect">
-            <a:avLst/>
-          </a:prstGeom>
-          <a:noFill/>
-        </p:spPr>
-        <p:txBody>
-          <a:bodyPr wrap="square" anchor="ctr" lIns="25400" rIns="25400" tIns="12700" bIns="12700">
-            <a:spAutoFit/>
-          </a:bodyPr>
-          <a:lstStyle/>
-          <a:p>
-            <a:pPr algn="ctr"/>
-            <a:r>
-              <a:rPr sz="1100" b="0" i="0">
-                <a:solidFill>
-                  <a:srgbClr val="FFFFFF"/>
-                </a:solidFill>
-                <a:latin typeface="Calibri"/>
-              </a:rPr>
-              <a:t>Örnek</a:t>
-            </a:r>
-          </a:p>
-        </p:txBody>
-      </p:sp>
-      <p:sp>
-        <p:nvSpPr>
-          <p:cNvPr id="26" name="Rectangle 25"/>
-          <p:cNvSpPr/>
-          <p:nvPr/>
-        </p:nvSpPr>
-        <p:spPr>
-          <a:xfrm>
-            <a:off x="8677656" y="3154680"/>
-            <a:ext cx="2240280" cy="1280160"/>
-          </a:xfrm>
-          <a:prstGeom prst="rect">
-            <a:avLst/>
-          </a:prstGeom>
-          <a:noFill/>
           <a:ln w="12700">
             <a:solidFill>
               <a:srgbClr val="0A808C"/>
@@ -17422,22 +16974,22 @@
       </p:sp>
       <p:sp>
         <p:nvSpPr>
-          <p:cNvPr id="27" name="TextBox 26"/>
-          <p:cNvSpPr txBox="1"/>
-          <p:nvPr/>
-        </p:nvSpPr>
-        <p:spPr>
-          <a:xfrm>
-            <a:off x="8677656" y="3218688"/>
-            <a:ext cx="2240280" cy="640080"/>
-          </a:xfrm>
-          <a:prstGeom prst="rect">
-            <a:avLst/>
-          </a:prstGeom>
-          <a:noFill/>
-        </p:spPr>
-        <p:txBody>
-          <a:bodyPr wrap="square" anchor="t" lIns="25400" rIns="25400" tIns="12700" bIns="12700">
+          <p:cNvPr id="15" name="TextBox 14"/>
+          <p:cNvSpPr txBox="1"/>
+          <p:nvPr/>
+        </p:nvSpPr>
+        <p:spPr>
+          <a:xfrm>
+            <a:off x="8677656" y="3246120"/>
+            <a:ext cx="2240280" cy="594360"/>
+          </a:xfrm>
+          <a:prstGeom prst="rect">
+            <a:avLst/>
+          </a:prstGeom>
+          <a:noFill/>
+        </p:spPr>
+        <p:txBody>
+          <a:bodyPr wrap="square" anchor="ctr" lIns="25400" rIns="25400" tIns="12700" bIns="12700">
             <a:spAutoFit/>
           </a:bodyPr>
           <a:lstStyle/>
@@ -17457,13 +17009,13 @@
       </p:sp>
       <p:sp>
         <p:nvSpPr>
-          <p:cNvPr id="28" name="TextBox 27"/>
-          <p:cNvSpPr txBox="1"/>
-          <p:nvPr/>
-        </p:nvSpPr>
-        <p:spPr>
-          <a:xfrm>
-            <a:off x="8677656" y="3840480"/>
+          <p:cNvPr id="16" name="TextBox 15"/>
+          <p:cNvSpPr txBox="1"/>
+          <p:nvPr/>
+        </p:nvSpPr>
+        <p:spPr>
+          <a:xfrm>
+            <a:off x="8677656" y="3822191"/>
             <a:ext cx="2240280" cy="457200"/>
           </a:xfrm>
           <a:prstGeom prst="rect">
@@ -17472,7 +17024,7 @@
           <a:noFill/>
         </p:spPr>
         <p:txBody>
-          <a:bodyPr wrap="square" anchor="t" lIns="25400" rIns="25400" tIns="12700" bIns="12700">
+          <a:bodyPr wrap="square" anchor="ctr" lIns="25400" rIns="25400" tIns="12700" bIns="12700">
             <a:spAutoFit/>
           </a:bodyPr>
           <a:lstStyle/>
@@ -17492,7 +17044,7 @@
       </p:sp>
       <p:sp>
         <p:nvSpPr>
-          <p:cNvPr id="29" name="TextBox 28"/>
+          <p:cNvPr id="17" name="TextBox 16"/>
           <p:cNvSpPr txBox="1"/>
           <p:nvPr/>
         </p:nvSpPr>
@@ -17527,7 +17079,7 @@
       </p:sp>
       <p:sp>
         <p:nvSpPr>
-          <p:cNvPr id="30" name="TextBox 29"/>
+          <p:cNvPr id="18" name="TextBox 17"/>
           <p:cNvSpPr txBox="1"/>
           <p:nvPr/>
         </p:nvSpPr>
@@ -20789,7 +20341,7 @@
         <p:spPr>
           <a:xfrm>
             <a:off x="365760" y="6473952"/>
-            <a:ext cx="7772400" cy="292608"/>
+            <a:ext cx="4206240" cy="292608"/>
           </a:xfrm>
           <a:prstGeom prst="rect">
             <a:avLst/>
@@ -20810,7 +20362,7 @@
                 </a:solidFill>
                 <a:latin typeface="Calibri"/>
               </a:rPr>
-              <a:t>AURIS  ·  Yapay Zekâ Üretimli Müzik Tespiti</a:t>
+              <a:t>AURIS · YZ Üretimli Müzik Tespiti</a:t>
             </a:r>
           </a:p>
         </p:txBody>
@@ -20823,8 +20375,8 @@
         </p:nvSpPr>
         <p:spPr>
           <a:xfrm>
-            <a:off x="5029200" y="6473952"/>
-            <a:ext cx="6793992" cy="292608"/>
+            <a:off x="4663440" y="6473952"/>
+            <a:ext cx="7159752" cy="292608"/>
           </a:xfrm>
           <a:prstGeom prst="rect">
             <a:avLst/>
@@ -22000,7 +21552,7 @@
         <p:spPr>
           <a:xfrm>
             <a:off x="365760" y="6473952"/>
-            <a:ext cx="7772400" cy="292608"/>
+            <a:ext cx="4206240" cy="292608"/>
           </a:xfrm>
           <a:prstGeom prst="rect">
             <a:avLst/>
@@ -22021,7 +21573,7 @@
                 </a:solidFill>
                 <a:latin typeface="Calibri"/>
               </a:rPr>
-              <a:t>AURIS  ·  Yapay Zekâ Üretimli Müzik Tespiti</a:t>
+              <a:t>AURIS · YZ Üretimli Müzik Tespiti</a:t>
             </a:r>
           </a:p>
         </p:txBody>
@@ -22034,8 +21586,8 @@
         </p:nvSpPr>
         <p:spPr>
           <a:xfrm>
-            <a:off x="5029200" y="6473952"/>
-            <a:ext cx="6793992" cy="292608"/>
+            <a:off x="4663440" y="6473952"/>
+            <a:ext cx="7159752" cy="292608"/>
           </a:xfrm>
           <a:prstGeom prst="rect">
             <a:avLst/>
@@ -23042,7 +22594,7 @@
         <p:spPr>
           <a:xfrm>
             <a:off x="365760" y="6473952"/>
-            <a:ext cx="7772400" cy="292608"/>
+            <a:ext cx="4206240" cy="292608"/>
           </a:xfrm>
           <a:prstGeom prst="rect">
             <a:avLst/>
@@ -23063,7 +22615,7 @@
                 </a:solidFill>
                 <a:latin typeface="Calibri"/>
               </a:rPr>
-              <a:t>AURIS  ·  Yapay Zekâ Üretimli Müzik Tespiti</a:t>
+              <a:t>AURIS · YZ Üretimli Müzik Tespiti</a:t>
             </a:r>
           </a:p>
         </p:txBody>
@@ -23076,8 +22628,8 @@
         </p:nvSpPr>
         <p:spPr>
           <a:xfrm>
-            <a:off x="5029200" y="6473952"/>
-            <a:ext cx="6793992" cy="292608"/>
+            <a:off x="4663440" y="6473952"/>
+            <a:ext cx="7159752" cy="292608"/>
           </a:xfrm>
           <a:prstGeom prst="rect">
             <a:avLst/>
@@ -24609,7 +24161,7 @@
         <p:spPr>
           <a:xfrm>
             <a:off x="365760" y="6473952"/>
-            <a:ext cx="7772400" cy="292608"/>
+            <a:ext cx="4206240" cy="292608"/>
           </a:xfrm>
           <a:prstGeom prst="rect">
             <a:avLst/>
@@ -24630,7 +24182,7 @@
                 </a:solidFill>
                 <a:latin typeface="Calibri"/>
               </a:rPr>
-              <a:t>AURIS  ·  Yapay Zekâ Üretimli Müzik Tespiti</a:t>
+              <a:t>AURIS · YZ Üretimli Müzik Tespiti</a:t>
             </a:r>
           </a:p>
         </p:txBody>
@@ -24643,8 +24195,8 @@
         </p:nvSpPr>
         <p:spPr>
           <a:xfrm>
-            <a:off x="5029200" y="6473952"/>
-            <a:ext cx="6793992" cy="292608"/>
+            <a:off x="4663440" y="6473952"/>
+            <a:ext cx="7159752" cy="292608"/>
           </a:xfrm>
           <a:prstGeom prst="rect">
             <a:avLst/>
@@ -27835,7 +27387,7 @@
         <p:spPr>
           <a:xfrm>
             <a:off x="365760" y="6473952"/>
-            <a:ext cx="7772400" cy="292608"/>
+            <a:ext cx="4206240" cy="292608"/>
           </a:xfrm>
           <a:prstGeom prst="rect">
             <a:avLst/>
@@ -27856,7 +27408,7 @@
                 </a:solidFill>
                 <a:latin typeface="Calibri"/>
               </a:rPr>
-              <a:t>AURIS  ·  Yapay Zekâ Üretimli Müzik Tespiti</a:t>
+              <a:t>AURIS · YZ Üretimli Müzik Tespiti</a:t>
             </a:r>
           </a:p>
         </p:txBody>
@@ -27869,8 +27421,8 @@
         </p:nvSpPr>
         <p:spPr>
           <a:xfrm>
-            <a:off x="5029200" y="6473952"/>
-            <a:ext cx="6793992" cy="292608"/>
+            <a:off x="4663440" y="6473952"/>
+            <a:ext cx="7159752" cy="292608"/>
           </a:xfrm>
           <a:prstGeom prst="rect">
             <a:avLst/>
@@ -29731,7 +29283,7 @@
         <p:spPr>
           <a:xfrm>
             <a:off x="365760" y="6473952"/>
-            <a:ext cx="7772400" cy="292608"/>
+            <a:ext cx="4206240" cy="292608"/>
           </a:xfrm>
           <a:prstGeom prst="rect">
             <a:avLst/>
@@ -29752,7 +29304,7 @@
                 </a:solidFill>
                 <a:latin typeface="Calibri"/>
               </a:rPr>
-              <a:t>AURIS  ·  Yapay Zekâ Üretimli Müzik Tespiti</a:t>
+              <a:t>AURIS · YZ Üretimli Müzik Tespiti</a:t>
             </a:r>
           </a:p>
         </p:txBody>
@@ -29765,8 +29317,8 @@
         </p:nvSpPr>
         <p:spPr>
           <a:xfrm>
-            <a:off x="5029200" y="6473952"/>
-            <a:ext cx="6793992" cy="292608"/>
+            <a:off x="4663440" y="6473952"/>
+            <a:ext cx="7159752" cy="292608"/>
           </a:xfrm>
           <a:prstGeom prst="rect">
             <a:avLst/>
@@ -31231,7 +30783,7 @@
         <p:spPr>
           <a:xfrm>
             <a:off x="8001000" y="3950208"/>
-            <a:ext cx="3822191" cy="2103120"/>
+            <a:ext cx="3822191" cy="2240280"/>
           </a:xfrm>
           <a:prstGeom prst="rect">
             <a:avLst/>
@@ -31275,7 +30827,7 @@
         <p:spPr>
           <a:xfrm>
             <a:off x="8001000" y="3950208"/>
-            <a:ext cx="91440" cy="2103120"/>
+            <a:ext cx="91440" cy="2240280"/>
           </a:xfrm>
           <a:prstGeom prst="rect">
             <a:avLst/>
@@ -31340,7 +30892,7 @@
                 </a:solidFill>
                 <a:latin typeface="Calibri"/>
               </a:rPr>
-              <a:t>Eşik Optimizasyonu</a:t>
+              <a:t>Eşik Optimizasyonu (Youden J)</a:t>
             </a:r>
           </a:p>
         </p:txBody>
@@ -31354,7 +30906,7 @@
         <p:spPr>
           <a:xfrm>
             <a:off x="8220456" y="4498848"/>
-            <a:ext cx="3438144" cy="1444751"/>
+            <a:ext cx="3438144" cy="1581912"/>
           </a:xfrm>
           <a:prstGeom prst="rect">
             <a:avLst/>
@@ -31420,7 +30972,7 @@
                 </a:solidFill>
                 <a:latin typeface="Calibri"/>
               </a:rPr>
-              <a:t>θ* = 0,4316  (0,5 yerine)</a:t>
+              <a:t>θ* = 0,4316  (varsayılan 0,5 yerine)</a:t>
             </a:r>
           </a:p>
           <a:p>
@@ -31458,49 +31010,14 @@
                 </a:solidFill>
                 <a:latin typeface="Calibri"/>
               </a:rPr>
-              <a:t>Brier skoru = 0,083 → iyi kalibre</a:t>
-            </a:r>
-          </a:p>
-        </p:txBody>
-      </p:sp>
-      <p:sp>
-        <p:nvSpPr>
-          <p:cNvPr id="39" name="TextBox 38"/>
-          <p:cNvSpPr txBox="1"/>
-          <p:nvPr/>
-        </p:nvSpPr>
-        <p:spPr>
-          <a:xfrm>
-            <a:off x="365760" y="5029200"/>
-            <a:ext cx="7406640" cy="1005840"/>
-          </a:xfrm>
-          <a:prstGeom prst="rect">
-            <a:avLst/>
-          </a:prstGeom>
-          <a:noFill/>
-        </p:spPr>
-        <p:txBody>
-          <a:bodyPr wrap="square" anchor="t" lIns="25400" rIns="25400" tIns="12700" bIns="12700">
-            <a:spAutoFit/>
-          </a:bodyPr>
-          <a:lstStyle/>
-          <a:p>
-            <a:pPr algn="l"/>
-            <a:r>
-              <a:rPr sz="1150" b="0" i="0">
-                <a:solidFill>
-                  <a:srgbClr val="242A30"/>
-                </a:solidFill>
-                <a:latin typeface="Calibri"/>
-              </a:rPr>
-              <a:t>Karar eşiği Youden J kriteriyle 0,5 yerine 0,4316'ya optimize edildi. Brier skoru 0,083, modelin güven düzeylerinin gerçek doğruluğu iyi yansıttığını gösterir.</a:t>
-            </a:r>
-          </a:p>
-        </p:txBody>
-      </p:sp>
-      <p:sp>
-        <p:nvSpPr>
-          <p:cNvPr id="40" name="Rectangle 39"/>
+              <a:t>Brier skoru = 0,083 → model iyi kalibre; güven düzeyleri gerçek doğruluğu yansıtır.</a:t>
+            </a:r>
+          </a:p>
+        </p:txBody>
+      </p:sp>
+      <p:sp>
+        <p:nvSpPr>
+          <p:cNvPr id="39" name="Rectangle 38"/>
           <p:cNvSpPr/>
           <p:nvPr/>
         </p:nvSpPr>
@@ -31544,49 +31061,49 @@
       </p:sp>
       <p:sp>
         <p:nvSpPr>
+          <p:cNvPr id="40" name="TextBox 39"/>
+          <p:cNvSpPr txBox="1"/>
+          <p:nvPr/>
+        </p:nvSpPr>
+        <p:spPr>
+          <a:xfrm>
+            <a:off x="365760" y="6473952"/>
+            <a:ext cx="4206240" cy="292608"/>
+          </a:xfrm>
+          <a:prstGeom prst="rect">
+            <a:avLst/>
+          </a:prstGeom>
+          <a:noFill/>
+        </p:spPr>
+        <p:txBody>
+          <a:bodyPr wrap="square" anchor="t" lIns="25400" rIns="25400" tIns="12700" bIns="12700">
+            <a:spAutoFit/>
+          </a:bodyPr>
+          <a:lstStyle/>
+          <a:p>
+            <a:pPr algn="l"/>
+            <a:r>
+              <a:rPr sz="900" b="0" i="0">
+                <a:solidFill>
+                  <a:srgbClr val="6A7480"/>
+                </a:solidFill>
+                <a:latin typeface="Calibri"/>
+              </a:rPr>
+              <a:t>AURIS · YZ Üretimli Müzik Tespiti</a:t>
+            </a:r>
+          </a:p>
+        </p:txBody>
+      </p:sp>
+      <p:sp>
+        <p:nvSpPr>
           <p:cNvPr id="41" name="TextBox 40"/>
           <p:cNvSpPr txBox="1"/>
           <p:nvPr/>
         </p:nvSpPr>
         <p:spPr>
           <a:xfrm>
-            <a:off x="365760" y="6473952"/>
-            <a:ext cx="7772400" cy="292608"/>
-          </a:xfrm>
-          <a:prstGeom prst="rect">
-            <a:avLst/>
-          </a:prstGeom>
-          <a:noFill/>
-        </p:spPr>
-        <p:txBody>
-          <a:bodyPr wrap="square" anchor="t" lIns="25400" rIns="25400" tIns="12700" bIns="12700">
-            <a:spAutoFit/>
-          </a:bodyPr>
-          <a:lstStyle/>
-          <a:p>
-            <a:pPr algn="l"/>
-            <a:r>
-              <a:rPr sz="900" b="0" i="0">
-                <a:solidFill>
-                  <a:srgbClr val="6A7480"/>
-                </a:solidFill>
-                <a:latin typeface="Calibri"/>
-              </a:rPr>
-              <a:t>AURIS  ·  Yapay Zekâ Üretimli Müzik Tespiti</a:t>
-            </a:r>
-          </a:p>
-        </p:txBody>
-      </p:sp>
-      <p:sp>
-        <p:nvSpPr>
-          <p:cNvPr id="42" name="TextBox 41"/>
-          <p:cNvSpPr txBox="1"/>
-          <p:nvPr/>
-        </p:nvSpPr>
-        <p:spPr>
-          <a:xfrm>
-            <a:off x="5029200" y="6473952"/>
-            <a:ext cx="6793992" cy="292608"/>
+            <a:off x="4663440" y="6473952"/>
+            <a:ext cx="7159752" cy="292608"/>
           </a:xfrm>
           <a:prstGeom prst="rect">
             <a:avLst/>
@@ -31883,7 +31400,7 @@
         </p:nvSpPr>
         <p:spPr>
           <a:xfrm>
-            <a:off x="365760" y="1572768"/>
+            <a:off x="365760" y="1536192"/>
             <a:ext cx="548640" cy="384048"/>
           </a:xfrm>
           <a:prstGeom prst="rect">
@@ -31927,7 +31444,7 @@
         </p:nvSpPr>
         <p:spPr>
           <a:xfrm>
-            <a:off x="365760" y="1572768"/>
+            <a:off x="365760" y="1536192"/>
             <a:ext cx="548640" cy="384048"/>
           </a:xfrm>
           <a:prstGeom prst="rect">
@@ -31962,7 +31479,7 @@
         </p:nvSpPr>
         <p:spPr>
           <a:xfrm>
-            <a:off x="914400" y="1572768"/>
+            <a:off x="914400" y="1536192"/>
             <a:ext cx="2834640" cy="384048"/>
           </a:xfrm>
           <a:prstGeom prst="rect">
@@ -32006,7 +31523,7 @@
         </p:nvSpPr>
         <p:spPr>
           <a:xfrm>
-            <a:off x="1005840" y="1572768"/>
+            <a:off x="1005840" y="1536192"/>
             <a:ext cx="2651760" cy="384048"/>
           </a:xfrm>
           <a:prstGeom prst="rect">
@@ -32041,7 +31558,7 @@
         </p:nvSpPr>
         <p:spPr>
           <a:xfrm>
-            <a:off x="3749039" y="1572768"/>
+            <a:off x="3749039" y="1536192"/>
             <a:ext cx="914400" cy="384048"/>
           </a:xfrm>
           <a:prstGeom prst="rect">
@@ -32085,7 +31602,7 @@
         </p:nvSpPr>
         <p:spPr>
           <a:xfrm>
-            <a:off x="3749039" y="1572768"/>
+            <a:off x="3749039" y="1536192"/>
             <a:ext cx="914400" cy="384048"/>
           </a:xfrm>
           <a:prstGeom prst="rect">
@@ -32120,7 +31637,7 @@
         </p:nvSpPr>
         <p:spPr>
           <a:xfrm>
-            <a:off x="4663440" y="1572768"/>
+            <a:off x="4663440" y="1536192"/>
             <a:ext cx="1783080" cy="384048"/>
           </a:xfrm>
           <a:prstGeom prst="rect">
@@ -32164,7 +31681,7 @@
         </p:nvSpPr>
         <p:spPr>
           <a:xfrm>
-            <a:off x="4663440" y="1572768"/>
+            <a:off x="4663440" y="1536192"/>
             <a:ext cx="1783080" cy="384048"/>
           </a:xfrm>
           <a:prstGeom prst="rect">
@@ -32199,7 +31716,7 @@
         </p:nvSpPr>
         <p:spPr>
           <a:xfrm>
-            <a:off x="6446520" y="1572768"/>
+            <a:off x="6446520" y="1536192"/>
             <a:ext cx="1600200" cy="384048"/>
           </a:xfrm>
           <a:prstGeom prst="rect">
@@ -32243,7 +31760,7 @@
         </p:nvSpPr>
         <p:spPr>
           <a:xfrm>
-            <a:off x="6446520" y="1572768"/>
+            <a:off x="6446520" y="1536192"/>
             <a:ext cx="1600200" cy="384048"/>
           </a:xfrm>
           <a:prstGeom prst="rect">
@@ -32278,7 +31795,7 @@
         </p:nvSpPr>
         <p:spPr>
           <a:xfrm>
-            <a:off x="8046720" y="1572768"/>
+            <a:off x="8046720" y="1536192"/>
             <a:ext cx="1783080" cy="384048"/>
           </a:xfrm>
           <a:prstGeom prst="rect">
@@ -32322,7 +31839,7 @@
         </p:nvSpPr>
         <p:spPr>
           <a:xfrm>
-            <a:off x="8046720" y="1572768"/>
+            <a:off x="8046720" y="1536192"/>
             <a:ext cx="1783080" cy="384048"/>
           </a:xfrm>
           <a:prstGeom prst="rect">
@@ -32357,7 +31874,7 @@
         </p:nvSpPr>
         <p:spPr>
           <a:xfrm>
-            <a:off x="9829800" y="1572768"/>
+            <a:off x="9829800" y="1536192"/>
             <a:ext cx="1627632" cy="384048"/>
           </a:xfrm>
           <a:prstGeom prst="rect">
@@ -32401,7 +31918,7 @@
         </p:nvSpPr>
         <p:spPr>
           <a:xfrm>
-            <a:off x="9829800" y="1572768"/>
+            <a:off x="9829800" y="1536192"/>
             <a:ext cx="1627632" cy="384048"/>
           </a:xfrm>
           <a:prstGeom prst="rect">
@@ -32436,8 +31953,8 @@
         </p:nvSpPr>
         <p:spPr>
           <a:xfrm>
-            <a:off x="365760" y="1956816"/>
-            <a:ext cx="548640" cy="393192"/>
+            <a:off x="365760" y="1920240"/>
+            <a:ext cx="548640" cy="374904"/>
           </a:xfrm>
           <a:prstGeom prst="rect">
             <a:avLst/>
@@ -32482,8 +31999,8 @@
         </p:nvSpPr>
         <p:spPr>
           <a:xfrm>
-            <a:off x="393192" y="1956816"/>
-            <a:ext cx="493776" cy="393192"/>
+            <a:off x="393192" y="1920240"/>
+            <a:ext cx="493776" cy="374904"/>
           </a:xfrm>
           <a:prstGeom prst="rect">
             <a:avLst/>
@@ -32517,8 +32034,8 @@
         </p:nvSpPr>
         <p:spPr>
           <a:xfrm>
-            <a:off x="914400" y="1956816"/>
-            <a:ext cx="2834640" cy="393192"/>
+            <a:off x="914400" y="1920240"/>
+            <a:ext cx="2834640" cy="374904"/>
           </a:xfrm>
           <a:prstGeom prst="rect">
             <a:avLst/>
@@ -32563,8 +32080,8 @@
         </p:nvSpPr>
         <p:spPr>
           <a:xfrm>
-            <a:off x="1005840" y="1956816"/>
-            <a:ext cx="2651760" cy="393192"/>
+            <a:off x="1005840" y="1920240"/>
+            <a:ext cx="2651760" cy="374904"/>
           </a:xfrm>
           <a:prstGeom prst="rect">
             <a:avLst/>
@@ -32598,8 +32115,8 @@
         </p:nvSpPr>
         <p:spPr>
           <a:xfrm>
-            <a:off x="3749039" y="1956816"/>
-            <a:ext cx="914400" cy="393192"/>
+            <a:off x="3749039" y="1920240"/>
+            <a:ext cx="914400" cy="374904"/>
           </a:xfrm>
           <a:prstGeom prst="rect">
             <a:avLst/>
@@ -32644,8 +32161,8 @@
         </p:nvSpPr>
         <p:spPr>
           <a:xfrm>
-            <a:off x="3776472" y="1956816"/>
-            <a:ext cx="859536" cy="393192"/>
+            <a:off x="3776472" y="1920240"/>
+            <a:ext cx="859536" cy="374904"/>
           </a:xfrm>
           <a:prstGeom prst="rect">
             <a:avLst/>
@@ -32679,8 +32196,8 @@
         </p:nvSpPr>
         <p:spPr>
           <a:xfrm>
-            <a:off x="4663440" y="1956816"/>
-            <a:ext cx="1783080" cy="393192"/>
+            <a:off x="4663440" y="1920240"/>
+            <a:ext cx="1783080" cy="374904"/>
           </a:xfrm>
           <a:prstGeom prst="rect">
             <a:avLst/>
@@ -32725,8 +32242,8 @@
         </p:nvSpPr>
         <p:spPr>
           <a:xfrm>
-            <a:off x="4690872" y="1956816"/>
-            <a:ext cx="1728216" cy="393192"/>
+            <a:off x="4690872" y="1920240"/>
+            <a:ext cx="1728216" cy="374904"/>
           </a:xfrm>
           <a:prstGeom prst="rect">
             <a:avLst/>
@@ -32760,8 +32277,8 @@
         </p:nvSpPr>
         <p:spPr>
           <a:xfrm>
-            <a:off x="6446520" y="1956816"/>
-            <a:ext cx="1600200" cy="393192"/>
+            <a:off x="6446520" y="1920240"/>
+            <a:ext cx="1600200" cy="374904"/>
           </a:xfrm>
           <a:prstGeom prst="rect">
             <a:avLst/>
@@ -32806,8 +32323,8 @@
         </p:nvSpPr>
         <p:spPr>
           <a:xfrm>
-            <a:off x="6473952" y="1956816"/>
-            <a:ext cx="1545336" cy="393192"/>
+            <a:off x="6473952" y="1920240"/>
+            <a:ext cx="1545336" cy="374904"/>
           </a:xfrm>
           <a:prstGeom prst="rect">
             <a:avLst/>
@@ -32841,8 +32358,8 @@
         </p:nvSpPr>
         <p:spPr>
           <a:xfrm>
-            <a:off x="8046720" y="1956816"/>
-            <a:ext cx="1783080" cy="393192"/>
+            <a:off x="8046720" y="1920240"/>
+            <a:ext cx="1783080" cy="374904"/>
           </a:xfrm>
           <a:prstGeom prst="rect">
             <a:avLst/>
@@ -32887,8 +32404,8 @@
         </p:nvSpPr>
         <p:spPr>
           <a:xfrm>
-            <a:off x="8074152" y="1956816"/>
-            <a:ext cx="1728216" cy="393192"/>
+            <a:off x="8074152" y="1920240"/>
+            <a:ext cx="1728216" cy="374904"/>
           </a:xfrm>
           <a:prstGeom prst="rect">
             <a:avLst/>
@@ -32922,8 +32439,8 @@
         </p:nvSpPr>
         <p:spPr>
           <a:xfrm>
-            <a:off x="9829800" y="1956816"/>
-            <a:ext cx="1627632" cy="393192"/>
+            <a:off x="9829800" y="1920240"/>
+            <a:ext cx="1627632" cy="374904"/>
           </a:xfrm>
           <a:prstGeom prst="rect">
             <a:avLst/>
@@ -32968,8 +32485,8 @@
         </p:nvSpPr>
         <p:spPr>
           <a:xfrm>
-            <a:off x="9857232" y="1956816"/>
-            <a:ext cx="1572768" cy="393192"/>
+            <a:off x="9857232" y="1920240"/>
+            <a:ext cx="1572768" cy="374904"/>
           </a:xfrm>
           <a:prstGeom prst="rect">
             <a:avLst/>
@@ -33003,8 +32520,8 @@
         </p:nvSpPr>
         <p:spPr>
           <a:xfrm>
-            <a:off x="365760" y="2350008"/>
-            <a:ext cx="548640" cy="393192"/>
+            <a:off x="365760" y="2295144"/>
+            <a:ext cx="548640" cy="374904"/>
           </a:xfrm>
           <a:prstGeom prst="rect">
             <a:avLst/>
@@ -33049,8 +32566,8 @@
         </p:nvSpPr>
         <p:spPr>
           <a:xfrm>
-            <a:off x="393192" y="2350008"/>
-            <a:ext cx="493776" cy="393192"/>
+            <a:off x="393192" y="2295144"/>
+            <a:ext cx="493776" cy="374904"/>
           </a:xfrm>
           <a:prstGeom prst="rect">
             <a:avLst/>
@@ -33084,8 +32601,8 @@
         </p:nvSpPr>
         <p:spPr>
           <a:xfrm>
-            <a:off x="914400" y="2350008"/>
-            <a:ext cx="2834640" cy="393192"/>
+            <a:off x="914400" y="2295144"/>
+            <a:ext cx="2834640" cy="374904"/>
           </a:xfrm>
           <a:prstGeom prst="rect">
             <a:avLst/>
@@ -33130,8 +32647,8 @@
         </p:nvSpPr>
         <p:spPr>
           <a:xfrm>
-            <a:off x="1005840" y="2350008"/>
-            <a:ext cx="2651760" cy="393192"/>
+            <a:off x="1005840" y="2295144"/>
+            <a:ext cx="2651760" cy="374904"/>
           </a:xfrm>
           <a:prstGeom prst="rect">
             <a:avLst/>
@@ -33165,8 +32682,8 @@
         </p:nvSpPr>
         <p:spPr>
           <a:xfrm>
-            <a:off x="3749039" y="2350008"/>
-            <a:ext cx="914400" cy="393192"/>
+            <a:off x="3749039" y="2295144"/>
+            <a:ext cx="914400" cy="374904"/>
           </a:xfrm>
           <a:prstGeom prst="rect">
             <a:avLst/>
@@ -33211,8 +32728,8 @@
         </p:nvSpPr>
         <p:spPr>
           <a:xfrm>
-            <a:off x="3776472" y="2350008"/>
-            <a:ext cx="859536" cy="393192"/>
+            <a:off x="3776472" y="2295144"/>
+            <a:ext cx="859536" cy="374904"/>
           </a:xfrm>
           <a:prstGeom prst="rect">
             <a:avLst/>
@@ -33246,8 +32763,8 @@
         </p:nvSpPr>
         <p:spPr>
           <a:xfrm>
-            <a:off x="4663440" y="2350008"/>
-            <a:ext cx="1783080" cy="393192"/>
+            <a:off x="4663440" y="2295144"/>
+            <a:ext cx="1783080" cy="374904"/>
           </a:xfrm>
           <a:prstGeom prst="rect">
             <a:avLst/>
@@ -33292,8 +32809,8 @@
         </p:nvSpPr>
         <p:spPr>
           <a:xfrm>
-            <a:off x="4690872" y="2350008"/>
-            <a:ext cx="1728216" cy="393192"/>
+            <a:off x="4690872" y="2295144"/>
+            <a:ext cx="1728216" cy="374904"/>
           </a:xfrm>
           <a:prstGeom prst="rect">
             <a:avLst/>
@@ -33327,8 +32844,8 @@
         </p:nvSpPr>
         <p:spPr>
           <a:xfrm>
-            <a:off x="6446520" y="2350008"/>
-            <a:ext cx="1600200" cy="393192"/>
+            <a:off x="6446520" y="2295144"/>
+            <a:ext cx="1600200" cy="374904"/>
           </a:xfrm>
           <a:prstGeom prst="rect">
             <a:avLst/>
@@ -33373,8 +32890,8 @@
         </p:nvSpPr>
         <p:spPr>
           <a:xfrm>
-            <a:off x="6473952" y="2350008"/>
-            <a:ext cx="1545336" cy="393192"/>
+            <a:off x="6473952" y="2295144"/>
+            <a:ext cx="1545336" cy="374904"/>
           </a:xfrm>
           <a:prstGeom prst="rect">
             <a:avLst/>
@@ -33408,8 +32925,8 @@
         </p:nvSpPr>
         <p:spPr>
           <a:xfrm>
-            <a:off x="8046720" y="2350008"/>
-            <a:ext cx="1783080" cy="393192"/>
+            <a:off x="8046720" y="2295144"/>
+            <a:ext cx="1783080" cy="374904"/>
           </a:xfrm>
           <a:prstGeom prst="rect">
             <a:avLst/>
@@ -33454,8 +32971,8 @@
         </p:nvSpPr>
         <p:spPr>
           <a:xfrm>
-            <a:off x="8074152" y="2350008"/>
-            <a:ext cx="1728216" cy="393192"/>
+            <a:off x="8074152" y="2295144"/>
+            <a:ext cx="1728216" cy="374904"/>
           </a:xfrm>
           <a:prstGeom prst="rect">
             <a:avLst/>
@@ -33489,8 +33006,8 @@
         </p:nvSpPr>
         <p:spPr>
           <a:xfrm>
-            <a:off x="9829800" y="2350008"/>
-            <a:ext cx="1627632" cy="393192"/>
+            <a:off x="9829800" y="2295144"/>
+            <a:ext cx="1627632" cy="374904"/>
           </a:xfrm>
           <a:prstGeom prst="rect">
             <a:avLst/>
@@ -33535,8 +33052,8 @@
         </p:nvSpPr>
         <p:spPr>
           <a:xfrm>
-            <a:off x="9857232" y="2350008"/>
-            <a:ext cx="1572768" cy="393192"/>
+            <a:off x="9857232" y="2295144"/>
+            <a:ext cx="1572768" cy="374904"/>
           </a:xfrm>
           <a:prstGeom prst="rect">
             <a:avLst/>
@@ -33570,8 +33087,8 @@
         </p:nvSpPr>
         <p:spPr>
           <a:xfrm>
-            <a:off x="365760" y="2743200"/>
-            <a:ext cx="548640" cy="393192"/>
+            <a:off x="365760" y="2670048"/>
+            <a:ext cx="548640" cy="374904"/>
           </a:xfrm>
           <a:prstGeom prst="rect">
             <a:avLst/>
@@ -33616,8 +33133,8 @@
         </p:nvSpPr>
         <p:spPr>
           <a:xfrm>
-            <a:off x="393192" y="2743200"/>
-            <a:ext cx="493776" cy="393192"/>
+            <a:off x="393192" y="2670048"/>
+            <a:ext cx="493776" cy="374904"/>
           </a:xfrm>
           <a:prstGeom prst="rect">
             <a:avLst/>
@@ -33651,8 +33168,8 @@
         </p:nvSpPr>
         <p:spPr>
           <a:xfrm>
-            <a:off x="914400" y="2743200"/>
-            <a:ext cx="2834640" cy="393192"/>
+            <a:off x="914400" y="2670048"/>
+            <a:ext cx="2834640" cy="374904"/>
           </a:xfrm>
           <a:prstGeom prst="rect">
             <a:avLst/>
@@ -33697,8 +33214,8 @@
         </p:nvSpPr>
         <p:spPr>
           <a:xfrm>
-            <a:off x="1005840" y="2743200"/>
-            <a:ext cx="2651760" cy="393192"/>
+            <a:off x="1005840" y="2670048"/>
+            <a:ext cx="2651760" cy="374904"/>
           </a:xfrm>
           <a:prstGeom prst="rect">
             <a:avLst/>
@@ -33732,8 +33249,8 @@
         </p:nvSpPr>
         <p:spPr>
           <a:xfrm>
-            <a:off x="3749039" y="2743200"/>
-            <a:ext cx="914400" cy="393192"/>
+            <a:off x="3749039" y="2670048"/>
+            <a:ext cx="914400" cy="374904"/>
           </a:xfrm>
           <a:prstGeom prst="rect">
             <a:avLst/>
@@ -33778,8 +33295,8 @@
         </p:nvSpPr>
         <p:spPr>
           <a:xfrm>
-            <a:off x="3776472" y="2743200"/>
-            <a:ext cx="859536" cy="393192"/>
+            <a:off x="3776472" y="2670048"/>
+            <a:ext cx="859536" cy="374904"/>
           </a:xfrm>
           <a:prstGeom prst="rect">
             <a:avLst/>
@@ -33813,8 +33330,8 @@
         </p:nvSpPr>
         <p:spPr>
           <a:xfrm>
-            <a:off x="4663440" y="2743200"/>
-            <a:ext cx="1783080" cy="393192"/>
+            <a:off x="4663440" y="2670048"/>
+            <a:ext cx="1783080" cy="374904"/>
           </a:xfrm>
           <a:prstGeom prst="rect">
             <a:avLst/>
@@ -33859,8 +33376,8 @@
         </p:nvSpPr>
         <p:spPr>
           <a:xfrm>
-            <a:off x="4690872" y="2743200"/>
-            <a:ext cx="1728216" cy="393192"/>
+            <a:off x="4690872" y="2670048"/>
+            <a:ext cx="1728216" cy="374904"/>
           </a:xfrm>
           <a:prstGeom prst="rect">
             <a:avLst/>
@@ -33894,8 +33411,8 @@
         </p:nvSpPr>
         <p:spPr>
           <a:xfrm>
-            <a:off x="6446520" y="2743200"/>
-            <a:ext cx="1600200" cy="393192"/>
+            <a:off x="6446520" y="2670048"/>
+            <a:ext cx="1600200" cy="374904"/>
           </a:xfrm>
           <a:prstGeom prst="rect">
             <a:avLst/>
@@ -33940,8 +33457,8 @@
         </p:nvSpPr>
         <p:spPr>
           <a:xfrm>
-            <a:off x="6473952" y="2743200"/>
-            <a:ext cx="1545336" cy="393192"/>
+            <a:off x="6473952" y="2670048"/>
+            <a:ext cx="1545336" cy="374904"/>
           </a:xfrm>
           <a:prstGeom prst="rect">
             <a:avLst/>
@@ -33975,8 +33492,8 @@
         </p:nvSpPr>
         <p:spPr>
           <a:xfrm>
-            <a:off x="8046720" y="2743200"/>
-            <a:ext cx="1783080" cy="393192"/>
+            <a:off x="8046720" y="2670048"/>
+            <a:ext cx="1783080" cy="374904"/>
           </a:xfrm>
           <a:prstGeom prst="rect">
             <a:avLst/>
@@ -34021,8 +33538,8 @@
         </p:nvSpPr>
         <p:spPr>
           <a:xfrm>
-            <a:off x="8074152" y="2743200"/>
-            <a:ext cx="1728216" cy="393192"/>
+            <a:off x="8074152" y="2670048"/>
+            <a:ext cx="1728216" cy="374904"/>
           </a:xfrm>
           <a:prstGeom prst="rect">
             <a:avLst/>
@@ -34056,8 +33573,8 @@
         </p:nvSpPr>
         <p:spPr>
           <a:xfrm>
-            <a:off x="9829800" y="2743200"/>
-            <a:ext cx="1627632" cy="393192"/>
+            <a:off x="9829800" y="2670048"/>
+            <a:ext cx="1627632" cy="374904"/>
           </a:xfrm>
           <a:prstGeom prst="rect">
             <a:avLst/>
@@ -34102,8 +33619,8 @@
         </p:nvSpPr>
         <p:spPr>
           <a:xfrm>
-            <a:off x="9857232" y="2743200"/>
-            <a:ext cx="1572768" cy="393192"/>
+            <a:off x="9857232" y="2670048"/>
+            <a:ext cx="1572768" cy="374904"/>
           </a:xfrm>
           <a:prstGeom prst="rect">
             <a:avLst/>
@@ -34137,8 +33654,8 @@
         </p:nvSpPr>
         <p:spPr>
           <a:xfrm>
-            <a:off x="365760" y="3136392"/>
-            <a:ext cx="548640" cy="393192"/>
+            <a:off x="365760" y="3044952"/>
+            <a:ext cx="548640" cy="374904"/>
           </a:xfrm>
           <a:prstGeom prst="rect">
             <a:avLst/>
@@ -34183,8 +33700,8 @@
         </p:nvSpPr>
         <p:spPr>
           <a:xfrm>
-            <a:off x="393192" y="3136392"/>
-            <a:ext cx="493776" cy="393192"/>
+            <a:off x="393192" y="3044952"/>
+            <a:ext cx="493776" cy="374904"/>
           </a:xfrm>
           <a:prstGeom prst="rect">
             <a:avLst/>
@@ -34218,8 +33735,8 @@
         </p:nvSpPr>
         <p:spPr>
           <a:xfrm>
-            <a:off x="914400" y="3136392"/>
-            <a:ext cx="2834640" cy="393192"/>
+            <a:off x="914400" y="3044952"/>
+            <a:ext cx="2834640" cy="374904"/>
           </a:xfrm>
           <a:prstGeom prst="rect">
             <a:avLst/>
@@ -34264,8 +33781,8 @@
         </p:nvSpPr>
         <p:spPr>
           <a:xfrm>
-            <a:off x="1005840" y="3136392"/>
-            <a:ext cx="2651760" cy="393192"/>
+            <a:off x="1005840" y="3044952"/>
+            <a:ext cx="2651760" cy="374904"/>
           </a:xfrm>
           <a:prstGeom prst="rect">
             <a:avLst/>
@@ -34299,8 +33816,8 @@
         </p:nvSpPr>
         <p:spPr>
           <a:xfrm>
-            <a:off x="3749039" y="3136392"/>
-            <a:ext cx="914400" cy="393192"/>
+            <a:off x="3749039" y="3044952"/>
+            <a:ext cx="914400" cy="374904"/>
           </a:xfrm>
           <a:prstGeom prst="rect">
             <a:avLst/>
@@ -34345,8 +33862,8 @@
         </p:nvSpPr>
         <p:spPr>
           <a:xfrm>
-            <a:off x="3776472" y="3136392"/>
-            <a:ext cx="859536" cy="393192"/>
+            <a:off x="3776472" y="3044952"/>
+            <a:ext cx="859536" cy="374904"/>
           </a:xfrm>
           <a:prstGeom prst="rect">
             <a:avLst/>
@@ -34380,8 +33897,8 @@
         </p:nvSpPr>
         <p:spPr>
           <a:xfrm>
-            <a:off x="4663440" y="3136392"/>
-            <a:ext cx="1783080" cy="393192"/>
+            <a:off x="4663440" y="3044952"/>
+            <a:ext cx="1783080" cy="374904"/>
           </a:xfrm>
           <a:prstGeom prst="rect">
             <a:avLst/>
@@ -34426,8 +33943,8 @@
         </p:nvSpPr>
         <p:spPr>
           <a:xfrm>
-            <a:off x="4690872" y="3136392"/>
-            <a:ext cx="1728216" cy="393192"/>
+            <a:off x="4690872" y="3044952"/>
+            <a:ext cx="1728216" cy="374904"/>
           </a:xfrm>
           <a:prstGeom prst="rect">
             <a:avLst/>
@@ -34461,8 +33978,8 @@
         </p:nvSpPr>
         <p:spPr>
           <a:xfrm>
-            <a:off x="6446520" y="3136392"/>
-            <a:ext cx="1600200" cy="393192"/>
+            <a:off x="6446520" y="3044952"/>
+            <a:ext cx="1600200" cy="374904"/>
           </a:xfrm>
           <a:prstGeom prst="rect">
             <a:avLst/>
@@ -34507,8 +34024,8 @@
         </p:nvSpPr>
         <p:spPr>
           <a:xfrm>
-            <a:off x="6473952" y="3136392"/>
-            <a:ext cx="1545336" cy="393192"/>
+            <a:off x="6473952" y="3044952"/>
+            <a:ext cx="1545336" cy="374904"/>
           </a:xfrm>
           <a:prstGeom prst="rect">
             <a:avLst/>
@@ -34542,8 +34059,8 @@
         </p:nvSpPr>
         <p:spPr>
           <a:xfrm>
-            <a:off x="8046720" y="3136392"/>
-            <a:ext cx="1783080" cy="393192"/>
+            <a:off x="8046720" y="3044952"/>
+            <a:ext cx="1783080" cy="374904"/>
           </a:xfrm>
           <a:prstGeom prst="rect">
             <a:avLst/>
@@ -34588,8 +34105,8 @@
         </p:nvSpPr>
         <p:spPr>
           <a:xfrm>
-            <a:off x="8074152" y="3136392"/>
-            <a:ext cx="1728216" cy="393192"/>
+            <a:off x="8074152" y="3044952"/>
+            <a:ext cx="1728216" cy="374904"/>
           </a:xfrm>
           <a:prstGeom prst="rect">
             <a:avLst/>
@@ -34623,8 +34140,8 @@
         </p:nvSpPr>
         <p:spPr>
           <a:xfrm>
-            <a:off x="9829800" y="3136392"/>
-            <a:ext cx="1627632" cy="393192"/>
+            <a:off x="9829800" y="3044952"/>
+            <a:ext cx="1627632" cy="374904"/>
           </a:xfrm>
           <a:prstGeom prst="rect">
             <a:avLst/>
@@ -34669,8 +34186,8 @@
         </p:nvSpPr>
         <p:spPr>
           <a:xfrm>
-            <a:off x="9857232" y="3136392"/>
-            <a:ext cx="1572768" cy="393192"/>
+            <a:off x="9857232" y="3044952"/>
+            <a:ext cx="1572768" cy="374904"/>
           </a:xfrm>
           <a:prstGeom prst="rect">
             <a:avLst/>
@@ -34704,8 +34221,8 @@
         </p:nvSpPr>
         <p:spPr>
           <a:xfrm>
-            <a:off x="365760" y="3529584"/>
-            <a:ext cx="548640" cy="393192"/>
+            <a:off x="365760" y="3419856"/>
+            <a:ext cx="548640" cy="374904"/>
           </a:xfrm>
           <a:prstGeom prst="rect">
             <a:avLst/>
@@ -34750,8 +34267,8 @@
         </p:nvSpPr>
         <p:spPr>
           <a:xfrm>
-            <a:off x="393192" y="3529584"/>
-            <a:ext cx="493776" cy="393192"/>
+            <a:off x="393192" y="3419856"/>
+            <a:ext cx="493776" cy="374904"/>
           </a:xfrm>
           <a:prstGeom prst="rect">
             <a:avLst/>
@@ -34785,8 +34302,8 @@
         </p:nvSpPr>
         <p:spPr>
           <a:xfrm>
-            <a:off x="914400" y="3529584"/>
-            <a:ext cx="2834640" cy="393192"/>
+            <a:off x="914400" y="3419856"/>
+            <a:ext cx="2834640" cy="374904"/>
           </a:xfrm>
           <a:prstGeom prst="rect">
             <a:avLst/>
@@ -34831,8 +34348,8 @@
         </p:nvSpPr>
         <p:spPr>
           <a:xfrm>
-            <a:off x="1005840" y="3529584"/>
-            <a:ext cx="2651760" cy="393192"/>
+            <a:off x="1005840" y="3419856"/>
+            <a:ext cx="2651760" cy="374904"/>
           </a:xfrm>
           <a:prstGeom prst="rect">
             <a:avLst/>
@@ -34866,8 +34383,8 @@
         </p:nvSpPr>
         <p:spPr>
           <a:xfrm>
-            <a:off x="3749039" y="3529584"/>
-            <a:ext cx="914400" cy="393192"/>
+            <a:off x="3749039" y="3419856"/>
+            <a:ext cx="914400" cy="374904"/>
           </a:xfrm>
           <a:prstGeom prst="rect">
             <a:avLst/>
@@ -34912,8 +34429,8 @@
         </p:nvSpPr>
         <p:spPr>
           <a:xfrm>
-            <a:off x="3776472" y="3529584"/>
-            <a:ext cx="859536" cy="393192"/>
+            <a:off x="3776472" y="3419856"/>
+            <a:ext cx="859536" cy="374904"/>
           </a:xfrm>
           <a:prstGeom prst="rect">
             <a:avLst/>
@@ -34947,8 +34464,8 @@
         </p:nvSpPr>
         <p:spPr>
           <a:xfrm>
-            <a:off x="4663440" y="3529584"/>
-            <a:ext cx="1783080" cy="393192"/>
+            <a:off x="4663440" y="3419856"/>
+            <a:ext cx="1783080" cy="374904"/>
           </a:xfrm>
           <a:prstGeom prst="rect">
             <a:avLst/>
@@ -34993,8 +34510,8 @@
         </p:nvSpPr>
         <p:spPr>
           <a:xfrm>
-            <a:off x="4690872" y="3529584"/>
-            <a:ext cx="1728216" cy="393192"/>
+            <a:off x="4690872" y="3419856"/>
+            <a:ext cx="1728216" cy="374904"/>
           </a:xfrm>
           <a:prstGeom prst="rect">
             <a:avLst/>
@@ -35028,8 +34545,8 @@
         </p:nvSpPr>
         <p:spPr>
           <a:xfrm>
-            <a:off x="6446520" y="3529584"/>
-            <a:ext cx="1600200" cy="393192"/>
+            <a:off x="6446520" y="3419856"/>
+            <a:ext cx="1600200" cy="374904"/>
           </a:xfrm>
           <a:prstGeom prst="rect">
             <a:avLst/>
@@ -35074,8 +34591,8 @@
         </p:nvSpPr>
         <p:spPr>
           <a:xfrm>
-            <a:off x="6473952" y="3529584"/>
-            <a:ext cx="1545336" cy="393192"/>
+            <a:off x="6473952" y="3419856"/>
+            <a:ext cx="1545336" cy="374904"/>
           </a:xfrm>
           <a:prstGeom prst="rect">
             <a:avLst/>
@@ -35109,8 +34626,8 @@
         </p:nvSpPr>
         <p:spPr>
           <a:xfrm>
-            <a:off x="8046720" y="3529584"/>
-            <a:ext cx="1783080" cy="393192"/>
+            <a:off x="8046720" y="3419856"/>
+            <a:ext cx="1783080" cy="374904"/>
           </a:xfrm>
           <a:prstGeom prst="rect">
             <a:avLst/>
@@ -35155,8 +34672,8 @@
         </p:nvSpPr>
         <p:spPr>
           <a:xfrm>
-            <a:off x="8074152" y="3529584"/>
-            <a:ext cx="1728216" cy="393192"/>
+            <a:off x="8074152" y="3419856"/>
+            <a:ext cx="1728216" cy="374904"/>
           </a:xfrm>
           <a:prstGeom prst="rect">
             <a:avLst/>
@@ -35190,8 +34707,8 @@
         </p:nvSpPr>
         <p:spPr>
           <a:xfrm>
-            <a:off x="9829800" y="3529584"/>
-            <a:ext cx="1627632" cy="393192"/>
+            <a:off x="9829800" y="3419856"/>
+            <a:ext cx="1627632" cy="374904"/>
           </a:xfrm>
           <a:prstGeom prst="rect">
             <a:avLst/>
@@ -35236,8 +34753,8 @@
         </p:nvSpPr>
         <p:spPr>
           <a:xfrm>
-            <a:off x="9857232" y="3529584"/>
-            <a:ext cx="1572768" cy="393192"/>
+            <a:off x="9857232" y="3419856"/>
+            <a:ext cx="1572768" cy="374904"/>
           </a:xfrm>
           <a:prstGeom prst="rect">
             <a:avLst/>
@@ -35271,8 +34788,8 @@
         </p:nvSpPr>
         <p:spPr>
           <a:xfrm>
-            <a:off x="365760" y="3922776"/>
-            <a:ext cx="548640" cy="393192"/>
+            <a:off x="365760" y="3794760"/>
+            <a:ext cx="548640" cy="374904"/>
           </a:xfrm>
           <a:prstGeom prst="rect">
             <a:avLst/>
@@ -35317,8 +34834,8 @@
         </p:nvSpPr>
         <p:spPr>
           <a:xfrm>
-            <a:off x="393192" y="3922776"/>
-            <a:ext cx="493776" cy="393192"/>
+            <a:off x="393192" y="3794760"/>
+            <a:ext cx="493776" cy="374904"/>
           </a:xfrm>
           <a:prstGeom prst="rect">
             <a:avLst/>
@@ -35352,8 +34869,8 @@
         </p:nvSpPr>
         <p:spPr>
           <a:xfrm>
-            <a:off x="914400" y="3922776"/>
-            <a:ext cx="2834640" cy="393192"/>
+            <a:off x="914400" y="3794760"/>
+            <a:ext cx="2834640" cy="374904"/>
           </a:xfrm>
           <a:prstGeom prst="rect">
             <a:avLst/>
@@ -35398,8 +34915,8 @@
         </p:nvSpPr>
         <p:spPr>
           <a:xfrm>
-            <a:off x="1005840" y="3922776"/>
-            <a:ext cx="2651760" cy="393192"/>
+            <a:off x="1005840" y="3794760"/>
+            <a:ext cx="2651760" cy="374904"/>
           </a:xfrm>
           <a:prstGeom prst="rect">
             <a:avLst/>
@@ -35433,8 +34950,8 @@
         </p:nvSpPr>
         <p:spPr>
           <a:xfrm>
-            <a:off x="3749039" y="3922776"/>
-            <a:ext cx="914400" cy="393192"/>
+            <a:off x="3749039" y="3794760"/>
+            <a:ext cx="914400" cy="374904"/>
           </a:xfrm>
           <a:prstGeom prst="rect">
             <a:avLst/>
@@ -35479,8 +34996,8 @@
         </p:nvSpPr>
         <p:spPr>
           <a:xfrm>
-            <a:off x="3776472" y="3922776"/>
-            <a:ext cx="859536" cy="393192"/>
+            <a:off x="3776472" y="3794760"/>
+            <a:ext cx="859536" cy="374904"/>
           </a:xfrm>
           <a:prstGeom prst="rect">
             <a:avLst/>
@@ -35514,8 +35031,8 @@
         </p:nvSpPr>
         <p:spPr>
           <a:xfrm>
-            <a:off x="4663440" y="3922776"/>
-            <a:ext cx="1783080" cy="393192"/>
+            <a:off x="4663440" y="3794760"/>
+            <a:ext cx="1783080" cy="374904"/>
           </a:xfrm>
           <a:prstGeom prst="rect">
             <a:avLst/>
@@ -35560,8 +35077,8 @@
         </p:nvSpPr>
         <p:spPr>
           <a:xfrm>
-            <a:off x="4690872" y="3922776"/>
-            <a:ext cx="1728216" cy="393192"/>
+            <a:off x="4690872" y="3794760"/>
+            <a:ext cx="1728216" cy="374904"/>
           </a:xfrm>
           <a:prstGeom prst="rect">
             <a:avLst/>
@@ -35595,8 +35112,8 @@
         </p:nvSpPr>
         <p:spPr>
           <a:xfrm>
-            <a:off x="6446520" y="3922776"/>
-            <a:ext cx="1600200" cy="393192"/>
+            <a:off x="6446520" y="3794760"/>
+            <a:ext cx="1600200" cy="374904"/>
           </a:xfrm>
           <a:prstGeom prst="rect">
             <a:avLst/>
@@ -35641,8 +35158,8 @@
         </p:nvSpPr>
         <p:spPr>
           <a:xfrm>
-            <a:off x="6473952" y="3922776"/>
-            <a:ext cx="1545336" cy="393192"/>
+            <a:off x="6473952" y="3794760"/>
+            <a:ext cx="1545336" cy="374904"/>
           </a:xfrm>
           <a:prstGeom prst="rect">
             <a:avLst/>
@@ -35676,8 +35193,8 @@
         </p:nvSpPr>
         <p:spPr>
           <a:xfrm>
-            <a:off x="8046720" y="3922776"/>
-            <a:ext cx="1783080" cy="393192"/>
+            <a:off x="8046720" y="3794760"/>
+            <a:ext cx="1783080" cy="374904"/>
           </a:xfrm>
           <a:prstGeom prst="rect">
             <a:avLst/>
@@ -35722,8 +35239,8 @@
         </p:nvSpPr>
         <p:spPr>
           <a:xfrm>
-            <a:off x="8074152" y="3922776"/>
-            <a:ext cx="1728216" cy="393192"/>
+            <a:off x="8074152" y="3794760"/>
+            <a:ext cx="1728216" cy="374904"/>
           </a:xfrm>
           <a:prstGeom prst="rect">
             <a:avLst/>
@@ -35757,8 +35274,8 @@
         </p:nvSpPr>
         <p:spPr>
           <a:xfrm>
-            <a:off x="9829800" y="3922776"/>
-            <a:ext cx="1627632" cy="393192"/>
+            <a:off x="9829800" y="3794760"/>
+            <a:ext cx="1627632" cy="374904"/>
           </a:xfrm>
           <a:prstGeom prst="rect">
             <a:avLst/>
@@ -35803,8 +35320,8 @@
         </p:nvSpPr>
         <p:spPr>
           <a:xfrm>
-            <a:off x="9857232" y="3922776"/>
-            <a:ext cx="1572768" cy="393192"/>
+            <a:off x="9857232" y="3794760"/>
+            <a:ext cx="1572768" cy="374904"/>
           </a:xfrm>
           <a:prstGeom prst="rect">
             <a:avLst/>
@@ -35838,8 +35355,8 @@
         </p:nvSpPr>
         <p:spPr>
           <a:xfrm>
-            <a:off x="365760" y="4315968"/>
-            <a:ext cx="548640" cy="393192"/>
+            <a:off x="365760" y="4169664"/>
+            <a:ext cx="548640" cy="374904"/>
           </a:xfrm>
           <a:prstGeom prst="rect">
             <a:avLst/>
@@ -35884,8 +35401,8 @@
         </p:nvSpPr>
         <p:spPr>
           <a:xfrm>
-            <a:off x="393192" y="4315968"/>
-            <a:ext cx="493776" cy="393192"/>
+            <a:off x="393192" y="4169664"/>
+            <a:ext cx="493776" cy="374904"/>
           </a:xfrm>
           <a:prstGeom prst="rect">
             <a:avLst/>
@@ -35919,8 +35436,8 @@
         </p:nvSpPr>
         <p:spPr>
           <a:xfrm>
-            <a:off x="914400" y="4315968"/>
-            <a:ext cx="2834640" cy="393192"/>
+            <a:off x="914400" y="4169664"/>
+            <a:ext cx="2834640" cy="374904"/>
           </a:xfrm>
           <a:prstGeom prst="rect">
             <a:avLst/>
@@ -35965,8 +35482,8 @@
         </p:nvSpPr>
         <p:spPr>
           <a:xfrm>
-            <a:off x="1005840" y="4315968"/>
-            <a:ext cx="2651760" cy="393192"/>
+            <a:off x="1005840" y="4169664"/>
+            <a:ext cx="2651760" cy="374904"/>
           </a:xfrm>
           <a:prstGeom prst="rect">
             <a:avLst/>
@@ -36000,8 +35517,8 @@
         </p:nvSpPr>
         <p:spPr>
           <a:xfrm>
-            <a:off x="3749039" y="4315968"/>
-            <a:ext cx="914400" cy="393192"/>
+            <a:off x="3749039" y="4169664"/>
+            <a:ext cx="914400" cy="374904"/>
           </a:xfrm>
           <a:prstGeom prst="rect">
             <a:avLst/>
@@ -36046,8 +35563,8 @@
         </p:nvSpPr>
         <p:spPr>
           <a:xfrm>
-            <a:off x="3776472" y="4315968"/>
-            <a:ext cx="859536" cy="393192"/>
+            <a:off x="3776472" y="4169664"/>
+            <a:ext cx="859536" cy="374904"/>
           </a:xfrm>
           <a:prstGeom prst="rect">
             <a:avLst/>
@@ -36081,8 +35598,8 @@
         </p:nvSpPr>
         <p:spPr>
           <a:xfrm>
-            <a:off x="4663440" y="4315968"/>
-            <a:ext cx="1783080" cy="393192"/>
+            <a:off x="4663440" y="4169664"/>
+            <a:ext cx="1783080" cy="374904"/>
           </a:xfrm>
           <a:prstGeom prst="rect">
             <a:avLst/>
@@ -36127,8 +35644,8 @@
         </p:nvSpPr>
         <p:spPr>
           <a:xfrm>
-            <a:off x="4690872" y="4315968"/>
-            <a:ext cx="1728216" cy="393192"/>
+            <a:off x="4690872" y="4169664"/>
+            <a:ext cx="1728216" cy="374904"/>
           </a:xfrm>
           <a:prstGeom prst="rect">
             <a:avLst/>
@@ -36162,8 +35679,8 @@
         </p:nvSpPr>
         <p:spPr>
           <a:xfrm>
-            <a:off x="6446520" y="4315968"/>
-            <a:ext cx="1600200" cy="393192"/>
+            <a:off x="6446520" y="4169664"/>
+            <a:ext cx="1600200" cy="374904"/>
           </a:xfrm>
           <a:prstGeom prst="rect">
             <a:avLst/>
@@ -36208,8 +35725,8 @@
         </p:nvSpPr>
         <p:spPr>
           <a:xfrm>
-            <a:off x="6473952" y="4315968"/>
-            <a:ext cx="1545336" cy="393192"/>
+            <a:off x="6473952" y="4169664"/>
+            <a:ext cx="1545336" cy="374904"/>
           </a:xfrm>
           <a:prstGeom prst="rect">
             <a:avLst/>
@@ -36243,8 +35760,8 @@
         </p:nvSpPr>
         <p:spPr>
           <a:xfrm>
-            <a:off x="8046720" y="4315968"/>
-            <a:ext cx="1783080" cy="393192"/>
+            <a:off x="8046720" y="4169664"/>
+            <a:ext cx="1783080" cy="374904"/>
           </a:xfrm>
           <a:prstGeom prst="rect">
             <a:avLst/>
@@ -36289,8 +35806,8 @@
         </p:nvSpPr>
         <p:spPr>
           <a:xfrm>
-            <a:off x="8074152" y="4315968"/>
-            <a:ext cx="1728216" cy="393192"/>
+            <a:off x="8074152" y="4169664"/>
+            <a:ext cx="1728216" cy="374904"/>
           </a:xfrm>
           <a:prstGeom prst="rect">
             <a:avLst/>
@@ -36324,8 +35841,8 @@
         </p:nvSpPr>
         <p:spPr>
           <a:xfrm>
-            <a:off x="9829800" y="4315968"/>
-            <a:ext cx="1627632" cy="393192"/>
+            <a:off x="9829800" y="4169664"/>
+            <a:ext cx="1627632" cy="374904"/>
           </a:xfrm>
           <a:prstGeom prst="rect">
             <a:avLst/>
@@ -36370,8 +35887,8 @@
         </p:nvSpPr>
         <p:spPr>
           <a:xfrm>
-            <a:off x="9857232" y="4315968"/>
-            <a:ext cx="1572768" cy="393192"/>
+            <a:off x="9857232" y="4169664"/>
+            <a:ext cx="1572768" cy="374904"/>
           </a:xfrm>
           <a:prstGeom prst="rect">
             <a:avLst/>
@@ -36405,8 +35922,8 @@
         </p:nvSpPr>
         <p:spPr>
           <a:xfrm>
-            <a:off x="365760" y="4709160"/>
-            <a:ext cx="548640" cy="393192"/>
+            <a:off x="365760" y="4544568"/>
+            <a:ext cx="548640" cy="374904"/>
           </a:xfrm>
           <a:prstGeom prst="rect">
             <a:avLst/>
@@ -36451,8 +35968,8 @@
         </p:nvSpPr>
         <p:spPr>
           <a:xfrm>
-            <a:off x="393192" y="4709160"/>
-            <a:ext cx="493776" cy="393192"/>
+            <a:off x="393192" y="4544568"/>
+            <a:ext cx="493776" cy="374904"/>
           </a:xfrm>
           <a:prstGeom prst="rect">
             <a:avLst/>
@@ -36486,8 +36003,8 @@
         </p:nvSpPr>
         <p:spPr>
           <a:xfrm>
-            <a:off x="914400" y="4709160"/>
-            <a:ext cx="2834640" cy="393192"/>
+            <a:off x="914400" y="4544568"/>
+            <a:ext cx="2834640" cy="374904"/>
           </a:xfrm>
           <a:prstGeom prst="rect">
             <a:avLst/>
@@ -36532,8 +36049,8 @@
         </p:nvSpPr>
         <p:spPr>
           <a:xfrm>
-            <a:off x="1005840" y="4709160"/>
-            <a:ext cx="2651760" cy="393192"/>
+            <a:off x="1005840" y="4544568"/>
+            <a:ext cx="2651760" cy="374904"/>
           </a:xfrm>
           <a:prstGeom prst="rect">
             <a:avLst/>
@@ -36567,8 +36084,8 @@
         </p:nvSpPr>
         <p:spPr>
           <a:xfrm>
-            <a:off x="3749039" y="4709160"/>
-            <a:ext cx="914400" cy="393192"/>
+            <a:off x="3749039" y="4544568"/>
+            <a:ext cx="914400" cy="374904"/>
           </a:xfrm>
           <a:prstGeom prst="rect">
             <a:avLst/>
@@ -36613,8 +36130,8 @@
         </p:nvSpPr>
         <p:spPr>
           <a:xfrm>
-            <a:off x="3776472" y="4709160"/>
-            <a:ext cx="859536" cy="393192"/>
+            <a:off x="3776472" y="4544568"/>
+            <a:ext cx="859536" cy="374904"/>
           </a:xfrm>
           <a:prstGeom prst="rect">
             <a:avLst/>
@@ -36648,8 +36165,8 @@
         </p:nvSpPr>
         <p:spPr>
           <a:xfrm>
-            <a:off x="4663440" y="4709160"/>
-            <a:ext cx="1783080" cy="393192"/>
+            <a:off x="4663440" y="4544568"/>
+            <a:ext cx="1783080" cy="374904"/>
           </a:xfrm>
           <a:prstGeom prst="rect">
             <a:avLst/>
@@ -36694,8 +36211,8 @@
         </p:nvSpPr>
         <p:spPr>
           <a:xfrm>
-            <a:off x="4690872" y="4709160"/>
-            <a:ext cx="1728216" cy="393192"/>
+            <a:off x="4690872" y="4544568"/>
+            <a:ext cx="1728216" cy="374904"/>
           </a:xfrm>
           <a:prstGeom prst="rect">
             <a:avLst/>
@@ -36729,8 +36246,8 @@
         </p:nvSpPr>
         <p:spPr>
           <a:xfrm>
-            <a:off x="6446520" y="4709160"/>
-            <a:ext cx="1600200" cy="393192"/>
+            <a:off x="6446520" y="4544568"/>
+            <a:ext cx="1600200" cy="374904"/>
           </a:xfrm>
           <a:prstGeom prst="rect">
             <a:avLst/>
@@ -36775,8 +36292,8 @@
         </p:nvSpPr>
         <p:spPr>
           <a:xfrm>
-            <a:off x="6473952" y="4709160"/>
-            <a:ext cx="1545336" cy="393192"/>
+            <a:off x="6473952" y="4544568"/>
+            <a:ext cx="1545336" cy="374904"/>
           </a:xfrm>
           <a:prstGeom prst="rect">
             <a:avLst/>
@@ -36810,8 +36327,8 @@
         </p:nvSpPr>
         <p:spPr>
           <a:xfrm>
-            <a:off x="8046720" y="4709160"/>
-            <a:ext cx="1783080" cy="393192"/>
+            <a:off x="8046720" y="4544568"/>
+            <a:ext cx="1783080" cy="374904"/>
           </a:xfrm>
           <a:prstGeom prst="rect">
             <a:avLst/>
@@ -36856,8 +36373,8 @@
         </p:nvSpPr>
         <p:spPr>
           <a:xfrm>
-            <a:off x="8074152" y="4709160"/>
-            <a:ext cx="1728216" cy="393192"/>
+            <a:off x="8074152" y="4544568"/>
+            <a:ext cx="1728216" cy="374904"/>
           </a:xfrm>
           <a:prstGeom prst="rect">
             <a:avLst/>
@@ -36891,8 +36408,8 @@
         </p:nvSpPr>
         <p:spPr>
           <a:xfrm>
-            <a:off x="9829800" y="4709160"/>
-            <a:ext cx="1627632" cy="393192"/>
+            <a:off x="9829800" y="4544568"/>
+            <a:ext cx="1627632" cy="374904"/>
           </a:xfrm>
           <a:prstGeom prst="rect">
             <a:avLst/>
@@ -36937,8 +36454,8 @@
         </p:nvSpPr>
         <p:spPr>
           <a:xfrm>
-            <a:off x="9857232" y="4709160"/>
-            <a:ext cx="1572768" cy="393192"/>
+            <a:off x="9857232" y="4544568"/>
+            <a:ext cx="1572768" cy="374904"/>
           </a:xfrm>
           <a:prstGeom prst="rect">
             <a:avLst/>
@@ -36972,8 +36489,8 @@
         </p:nvSpPr>
         <p:spPr>
           <a:xfrm>
-            <a:off x="365760" y="5102352"/>
-            <a:ext cx="548640" cy="393192"/>
+            <a:off x="365760" y="4919472"/>
+            <a:ext cx="548640" cy="374904"/>
           </a:xfrm>
           <a:prstGeom prst="rect">
             <a:avLst/>
@@ -37018,8 +36535,8 @@
         </p:nvSpPr>
         <p:spPr>
           <a:xfrm>
-            <a:off x="393192" y="5102352"/>
-            <a:ext cx="493776" cy="393192"/>
+            <a:off x="393192" y="4919472"/>
+            <a:ext cx="493776" cy="374904"/>
           </a:xfrm>
           <a:prstGeom prst="rect">
             <a:avLst/>
@@ -37053,8 +36570,8 @@
         </p:nvSpPr>
         <p:spPr>
           <a:xfrm>
-            <a:off x="914400" y="5102352"/>
-            <a:ext cx="2834640" cy="393192"/>
+            <a:off x="914400" y="4919472"/>
+            <a:ext cx="2834640" cy="374904"/>
           </a:xfrm>
           <a:prstGeom prst="rect">
             <a:avLst/>
@@ -37099,8 +36616,8 @@
         </p:nvSpPr>
         <p:spPr>
           <a:xfrm>
-            <a:off x="1005840" y="5102352"/>
-            <a:ext cx="2651760" cy="393192"/>
+            <a:off x="1005840" y="4919472"/>
+            <a:ext cx="2651760" cy="374904"/>
           </a:xfrm>
           <a:prstGeom prst="rect">
             <a:avLst/>
@@ -37134,8 +36651,8 @@
         </p:nvSpPr>
         <p:spPr>
           <a:xfrm>
-            <a:off x="3749039" y="5102352"/>
-            <a:ext cx="914400" cy="393192"/>
+            <a:off x="3749039" y="4919472"/>
+            <a:ext cx="914400" cy="374904"/>
           </a:xfrm>
           <a:prstGeom prst="rect">
             <a:avLst/>
@@ -37180,8 +36697,8 @@
         </p:nvSpPr>
         <p:spPr>
           <a:xfrm>
-            <a:off x="3776472" y="5102352"/>
-            <a:ext cx="859536" cy="393192"/>
+            <a:off x="3776472" y="4919472"/>
+            <a:ext cx="859536" cy="374904"/>
           </a:xfrm>
           <a:prstGeom prst="rect">
             <a:avLst/>
@@ -37215,8 +36732,8 @@
         </p:nvSpPr>
         <p:spPr>
           <a:xfrm>
-            <a:off x="4663440" y="5102352"/>
-            <a:ext cx="1783080" cy="393192"/>
+            <a:off x="4663440" y="4919472"/>
+            <a:ext cx="1783080" cy="374904"/>
           </a:xfrm>
           <a:prstGeom prst="rect">
             <a:avLst/>
@@ -37261,8 +36778,8 @@
         </p:nvSpPr>
         <p:spPr>
           <a:xfrm>
-            <a:off x="4690872" y="5102352"/>
-            <a:ext cx="1728216" cy="393192"/>
+            <a:off x="4690872" y="4919472"/>
+            <a:ext cx="1728216" cy="374904"/>
           </a:xfrm>
           <a:prstGeom prst="rect">
             <a:avLst/>
@@ -37296,8 +36813,8 @@
         </p:nvSpPr>
         <p:spPr>
           <a:xfrm>
-            <a:off x="6446520" y="5102352"/>
-            <a:ext cx="1600200" cy="393192"/>
+            <a:off x="6446520" y="4919472"/>
+            <a:ext cx="1600200" cy="374904"/>
           </a:xfrm>
           <a:prstGeom prst="rect">
             <a:avLst/>
@@ -37342,8 +36859,8 @@
         </p:nvSpPr>
         <p:spPr>
           <a:xfrm>
-            <a:off x="6473952" y="5102352"/>
-            <a:ext cx="1545336" cy="393192"/>
+            <a:off x="6473952" y="4919472"/>
+            <a:ext cx="1545336" cy="374904"/>
           </a:xfrm>
           <a:prstGeom prst="rect">
             <a:avLst/>
@@ -37377,8 +36894,8 @@
         </p:nvSpPr>
         <p:spPr>
           <a:xfrm>
-            <a:off x="8046720" y="5102352"/>
-            <a:ext cx="1783080" cy="393192"/>
+            <a:off x="8046720" y="4919472"/>
+            <a:ext cx="1783080" cy="374904"/>
           </a:xfrm>
           <a:prstGeom prst="rect">
             <a:avLst/>
@@ -37423,8 +36940,8 @@
         </p:nvSpPr>
         <p:spPr>
           <a:xfrm>
-            <a:off x="8074152" y="5102352"/>
-            <a:ext cx="1728216" cy="393192"/>
+            <a:off x="8074152" y="4919472"/>
+            <a:ext cx="1728216" cy="374904"/>
           </a:xfrm>
           <a:prstGeom prst="rect">
             <a:avLst/>
@@ -37458,8 +36975,8 @@
         </p:nvSpPr>
         <p:spPr>
           <a:xfrm>
-            <a:off x="9829800" y="5102352"/>
-            <a:ext cx="1627632" cy="393192"/>
+            <a:off x="9829800" y="4919472"/>
+            <a:ext cx="1627632" cy="374904"/>
           </a:xfrm>
           <a:prstGeom prst="rect">
             <a:avLst/>
@@ -37504,8 +37021,8 @@
         </p:nvSpPr>
         <p:spPr>
           <a:xfrm>
-            <a:off x="9857232" y="5102352"/>
-            <a:ext cx="1572768" cy="393192"/>
+            <a:off x="9857232" y="4919472"/>
+            <a:ext cx="1572768" cy="374904"/>
           </a:xfrm>
           <a:prstGeom prst="rect">
             <a:avLst/>
@@ -37539,8 +37056,8 @@
         </p:nvSpPr>
         <p:spPr>
           <a:xfrm>
-            <a:off x="365760" y="5495544"/>
-            <a:ext cx="548640" cy="393192"/>
+            <a:off x="365760" y="5294376"/>
+            <a:ext cx="548640" cy="374904"/>
           </a:xfrm>
           <a:prstGeom prst="rect">
             <a:avLst/>
@@ -37585,8 +37102,8 @@
         </p:nvSpPr>
         <p:spPr>
           <a:xfrm>
-            <a:off x="393192" y="5495544"/>
-            <a:ext cx="493776" cy="393192"/>
+            <a:off x="393192" y="5294376"/>
+            <a:ext cx="493776" cy="374904"/>
           </a:xfrm>
           <a:prstGeom prst="rect">
             <a:avLst/>
@@ -37620,8 +37137,8 @@
         </p:nvSpPr>
         <p:spPr>
           <a:xfrm>
-            <a:off x="914400" y="5495544"/>
-            <a:ext cx="2834640" cy="393192"/>
+            <a:off x="914400" y="5294376"/>
+            <a:ext cx="2834640" cy="374904"/>
           </a:xfrm>
           <a:prstGeom prst="rect">
             <a:avLst/>
@@ -37666,8 +37183,8 @@
         </p:nvSpPr>
         <p:spPr>
           <a:xfrm>
-            <a:off x="1005840" y="5495544"/>
-            <a:ext cx="2651760" cy="393192"/>
+            <a:off x="1005840" y="5294376"/>
+            <a:ext cx="2651760" cy="374904"/>
           </a:xfrm>
           <a:prstGeom prst="rect">
             <a:avLst/>
@@ -37701,8 +37218,8 @@
         </p:nvSpPr>
         <p:spPr>
           <a:xfrm>
-            <a:off x="3749039" y="5495544"/>
-            <a:ext cx="914400" cy="393192"/>
+            <a:off x="3749039" y="5294376"/>
+            <a:ext cx="914400" cy="374904"/>
           </a:xfrm>
           <a:prstGeom prst="rect">
             <a:avLst/>
@@ -37747,8 +37264,8 @@
         </p:nvSpPr>
         <p:spPr>
           <a:xfrm>
-            <a:off x="3776472" y="5495544"/>
-            <a:ext cx="859536" cy="393192"/>
+            <a:off x="3776472" y="5294376"/>
+            <a:ext cx="859536" cy="374904"/>
           </a:xfrm>
           <a:prstGeom prst="rect">
             <a:avLst/>
@@ -37782,8 +37299,8 @@
         </p:nvSpPr>
         <p:spPr>
           <a:xfrm>
-            <a:off x="4663440" y="5495544"/>
-            <a:ext cx="1783080" cy="393192"/>
+            <a:off x="4663440" y="5294376"/>
+            <a:ext cx="1783080" cy="374904"/>
           </a:xfrm>
           <a:prstGeom prst="rect">
             <a:avLst/>
@@ -37828,8 +37345,8 @@
         </p:nvSpPr>
         <p:spPr>
           <a:xfrm>
-            <a:off x="4690872" y="5495544"/>
-            <a:ext cx="1728216" cy="393192"/>
+            <a:off x="4690872" y="5294376"/>
+            <a:ext cx="1728216" cy="374904"/>
           </a:xfrm>
           <a:prstGeom prst="rect">
             <a:avLst/>
@@ -37863,8 +37380,8 @@
         </p:nvSpPr>
         <p:spPr>
           <a:xfrm>
-            <a:off x="6446520" y="5495544"/>
-            <a:ext cx="1600200" cy="393192"/>
+            <a:off x="6446520" y="5294376"/>
+            <a:ext cx="1600200" cy="374904"/>
           </a:xfrm>
           <a:prstGeom prst="rect">
             <a:avLst/>
@@ -37909,8 +37426,8 @@
         </p:nvSpPr>
         <p:spPr>
           <a:xfrm>
-            <a:off x="6473952" y="5495544"/>
-            <a:ext cx="1545336" cy="393192"/>
+            <a:off x="6473952" y="5294376"/>
+            <a:ext cx="1545336" cy="374904"/>
           </a:xfrm>
           <a:prstGeom prst="rect">
             <a:avLst/>
@@ -37944,8 +37461,8 @@
         </p:nvSpPr>
         <p:spPr>
           <a:xfrm>
-            <a:off x="8046720" y="5495544"/>
-            <a:ext cx="1783080" cy="393192"/>
+            <a:off x="8046720" y="5294376"/>
+            <a:ext cx="1783080" cy="374904"/>
           </a:xfrm>
           <a:prstGeom prst="rect">
             <a:avLst/>
@@ -37990,8 +37507,8 @@
         </p:nvSpPr>
         <p:spPr>
           <a:xfrm>
-            <a:off x="8074152" y="5495544"/>
-            <a:ext cx="1728216" cy="393192"/>
+            <a:off x="8074152" y="5294376"/>
+            <a:ext cx="1728216" cy="374904"/>
           </a:xfrm>
           <a:prstGeom prst="rect">
             <a:avLst/>
@@ -38025,8 +37542,8 @@
         </p:nvSpPr>
         <p:spPr>
           <a:xfrm>
-            <a:off x="9829800" y="5495544"/>
-            <a:ext cx="1627632" cy="393192"/>
+            <a:off x="9829800" y="5294376"/>
+            <a:ext cx="1627632" cy="374904"/>
           </a:xfrm>
           <a:prstGeom prst="rect">
             <a:avLst/>
@@ -38071,8 +37588,8 @@
         </p:nvSpPr>
         <p:spPr>
           <a:xfrm>
-            <a:off x="9857232" y="5495544"/>
-            <a:ext cx="1572768" cy="393192"/>
+            <a:off x="9857232" y="5294376"/>
+            <a:ext cx="1572768" cy="374904"/>
           </a:xfrm>
           <a:prstGeom prst="rect">
             <a:avLst/>
@@ -38106,8 +37623,8 @@
         </p:nvSpPr>
         <p:spPr>
           <a:xfrm>
-            <a:off x="365760" y="5888736"/>
-            <a:ext cx="548640" cy="393192"/>
+            <a:off x="365760" y="5669280"/>
+            <a:ext cx="548640" cy="374904"/>
           </a:xfrm>
           <a:prstGeom prst="rect">
             <a:avLst/>
@@ -38152,8 +37669,8 @@
         </p:nvSpPr>
         <p:spPr>
           <a:xfrm>
-            <a:off x="393192" y="5888736"/>
-            <a:ext cx="493776" cy="393192"/>
+            <a:off x="393192" y="5669280"/>
+            <a:ext cx="493776" cy="374904"/>
           </a:xfrm>
           <a:prstGeom prst="rect">
             <a:avLst/>
@@ -38187,8 +37704,8 @@
         </p:nvSpPr>
         <p:spPr>
           <a:xfrm>
-            <a:off x="914400" y="5888736"/>
-            <a:ext cx="2834640" cy="393192"/>
+            <a:off x="914400" y="5669280"/>
+            <a:ext cx="2834640" cy="374904"/>
           </a:xfrm>
           <a:prstGeom prst="rect">
             <a:avLst/>
@@ -38233,8 +37750,8 @@
         </p:nvSpPr>
         <p:spPr>
           <a:xfrm>
-            <a:off x="1005840" y="5888736"/>
-            <a:ext cx="2651760" cy="393192"/>
+            <a:off x="1005840" y="5669280"/>
+            <a:ext cx="2651760" cy="374904"/>
           </a:xfrm>
           <a:prstGeom prst="rect">
             <a:avLst/>
@@ -38268,8 +37785,8 @@
         </p:nvSpPr>
         <p:spPr>
           <a:xfrm>
-            <a:off x="3749039" y="5888736"/>
-            <a:ext cx="914400" cy="393192"/>
+            <a:off x="3749039" y="5669280"/>
+            <a:ext cx="914400" cy="374904"/>
           </a:xfrm>
           <a:prstGeom prst="rect">
             <a:avLst/>
@@ -38314,8 +37831,8 @@
         </p:nvSpPr>
         <p:spPr>
           <a:xfrm>
-            <a:off x="3776472" y="5888736"/>
-            <a:ext cx="859536" cy="393192"/>
+            <a:off x="3776472" y="5669280"/>
+            <a:ext cx="859536" cy="374904"/>
           </a:xfrm>
           <a:prstGeom prst="rect">
             <a:avLst/>
@@ -38349,8 +37866,8 @@
         </p:nvSpPr>
         <p:spPr>
           <a:xfrm>
-            <a:off x="4663440" y="5888736"/>
-            <a:ext cx="1783080" cy="393192"/>
+            <a:off x="4663440" y="5669280"/>
+            <a:ext cx="1783080" cy="374904"/>
           </a:xfrm>
           <a:prstGeom prst="rect">
             <a:avLst/>
@@ -38395,8 +37912,8 @@
         </p:nvSpPr>
         <p:spPr>
           <a:xfrm>
-            <a:off x="4690872" y="5888736"/>
-            <a:ext cx="1728216" cy="393192"/>
+            <a:off x="4690872" y="5669280"/>
+            <a:ext cx="1728216" cy="374904"/>
           </a:xfrm>
           <a:prstGeom prst="rect">
             <a:avLst/>
@@ -38430,8 +37947,8 @@
         </p:nvSpPr>
         <p:spPr>
           <a:xfrm>
-            <a:off x="6446520" y="5888736"/>
-            <a:ext cx="1600200" cy="393192"/>
+            <a:off x="6446520" y="5669280"/>
+            <a:ext cx="1600200" cy="374904"/>
           </a:xfrm>
           <a:prstGeom prst="rect">
             <a:avLst/>
@@ -38476,8 +37993,8 @@
         </p:nvSpPr>
         <p:spPr>
           <a:xfrm>
-            <a:off x="6473952" y="5888736"/>
-            <a:ext cx="1545336" cy="393192"/>
+            <a:off x="6473952" y="5669280"/>
+            <a:ext cx="1545336" cy="374904"/>
           </a:xfrm>
           <a:prstGeom prst="rect">
             <a:avLst/>
@@ -38511,8 +38028,8 @@
         </p:nvSpPr>
         <p:spPr>
           <a:xfrm>
-            <a:off x="8046720" y="5888736"/>
-            <a:ext cx="1783080" cy="393192"/>
+            <a:off x="8046720" y="5669280"/>
+            <a:ext cx="1783080" cy="374904"/>
           </a:xfrm>
           <a:prstGeom prst="rect">
             <a:avLst/>
@@ -38557,8 +38074,8 @@
         </p:nvSpPr>
         <p:spPr>
           <a:xfrm>
-            <a:off x="8074152" y="5888736"/>
-            <a:ext cx="1728216" cy="393192"/>
+            <a:off x="8074152" y="5669280"/>
+            <a:ext cx="1728216" cy="374904"/>
           </a:xfrm>
           <a:prstGeom prst="rect">
             <a:avLst/>
@@ -38592,8 +38109,8 @@
         </p:nvSpPr>
         <p:spPr>
           <a:xfrm>
-            <a:off x="9829800" y="5888736"/>
-            <a:ext cx="1627632" cy="393192"/>
+            <a:off x="9829800" y="5669280"/>
+            <a:ext cx="1627632" cy="374904"/>
           </a:xfrm>
           <a:prstGeom prst="rect">
             <a:avLst/>
@@ -38638,8 +38155,8 @@
         </p:nvSpPr>
         <p:spPr>
           <a:xfrm>
-            <a:off x="9857232" y="5888736"/>
-            <a:ext cx="1572768" cy="393192"/>
+            <a:off x="9857232" y="5669280"/>
+            <a:ext cx="1572768" cy="374904"/>
           </a:xfrm>
           <a:prstGeom prst="rect">
             <a:avLst/>
@@ -38673,8 +38190,8 @@
         </p:nvSpPr>
         <p:spPr>
           <a:xfrm>
-            <a:off x="365760" y="6309360"/>
-            <a:ext cx="11430000" cy="292608"/>
+            <a:off x="365760" y="6053328"/>
+            <a:ext cx="11430000" cy="310896"/>
           </a:xfrm>
           <a:prstGeom prst="rect">
             <a:avLst/>
@@ -38753,7 +38270,7 @@
         <p:spPr>
           <a:xfrm>
             <a:off x="365760" y="6473952"/>
-            <a:ext cx="7772400" cy="292608"/>
+            <a:ext cx="4206240" cy="292608"/>
           </a:xfrm>
           <a:prstGeom prst="rect">
             <a:avLst/>
@@ -38774,7 +38291,7 @@
                 </a:solidFill>
                 <a:latin typeface="Calibri"/>
               </a:rPr>
-              <a:t>AURIS  ·  Yapay Zekâ Üretimli Müzik Tespiti</a:t>
+              <a:t>AURIS · YZ Üretimli Müzik Tespiti</a:t>
             </a:r>
           </a:p>
         </p:txBody>
@@ -38787,8 +38304,8 @@
         </p:nvSpPr>
         <p:spPr>
           <a:xfrm>
-            <a:off x="5029200" y="6473952"/>
-            <a:ext cx="6793992" cy="292608"/>
+            <a:off x="4663440" y="6473952"/>
+            <a:ext cx="7159752" cy="292608"/>
           </a:xfrm>
           <a:prstGeom prst="rect">
             <a:avLst/>
